--- a/presentation/cultural-plan.pptx
+++ b/presentation/cultural-plan.pptx
@@ -514,7 +514,7 @@
           <a:lstStyle/>
           <a:p>
             <a:r>
-              <a:t>Цель — сразу объяснить пользу: «Подбираем культурные события по времени, бюджету и составу посетителей, а выбранное сохраняем в MAX». ФИО взяты дословно из задания пользователя. Официальное полное название хакатона в предоставленном PDF не установлено, поэтому выбран нейтральный вариант «Хакатон MAX · 2026»; роли и название команды не придуманы. Основание обещания: README (https://github.com/AiratBastanov/HackMaxBot2026/blob/32127a01e126658599e0da4d0ca4de59af52752a/README.md).</a:t>
+              <a:t>«Подбираем события по времени, бюджету и составу посетителей, а выбор сохраняем в MAX. На 28 сентября каталог вырос до 11 городов, 26 источников и 858 событий». Это измеренный снимок, не обещание постоянной свежести. Участники: Садыков Булат, Бастанов Айрат, Белова Маргарита. Пользовательские эффекты ещё не измерены.</a:t>
             </a:r>
           </a:p>
         </p:txBody>
@@ -584,13 +584,7 @@
           <a:lstStyle/>
           <a:p>
             <a:r>
-              <a:t>Цель — позитивно сформулировать эффект и способ проверки. «Сравним время до выбора и завершение одинакового задания; отдельно узнаем, оказался ли сохранённый вариант полезным». Само сохранение не доказывает намерения купить билет или фактического посещения.</a:t>
-            </a:r>
-          </a:p>
-          <a:p/>
-          <a:p>
-            <a:r>
-              <a:t>Основания статуса: README (https://github.com/AiratBastanov/HackMaxBot2026/blob/32127a01e126658599e0da4d0ca4de59af52752a/README.md); страницы 10, 12 и 17 задания. Все метрики предложены, пользовательский спрос и улучшения ещё не измерены. Это не заявление о внедрённой аналитике и не просьба провести исследование сейчас.</a:t>
+              <a:t>Планируем сравнить самостоятельный поиск и диалог на одинаковых заданиях: время до выбора, завершение подбора и полезное сохранение. Сейчас это предлагаемые метрики. Не заявляем интервью, проценты улучшения, число пользователей, экономию времени или uptime.</a:t>
             </a:r>
           </a:p>
         </p:txBody>
@@ -660,13 +654,7 @@
           <a:lstStyle/>
           <a:p>
             <a:r>
-              <a:t>Цель — показать материалы и порядок ознакомления. «Код, инструкция, данные и примеры позволяют повторить локальную оценку. В комплекте также презентация и применимые API-контракты». Подробные команды остаются в README.</a:t>
-            </a:r>
-          </a:p>
-          <a:p/>
-          <a:p>
-            <a:r>
-              <a:t>Основания: чек-лист (https://github.com/AiratBastanov/HackMaxBot2026/blob/32127a01e126658599e0da4d0ca4de59af52752a/docs/SUBMISSION_CHECKLIST.md), README (https://github.com/AiratBastanov/HackMaxBot2026/blob/32127a01e126658599e0da4d0ca4de59af52752a/README.md), OpenAPI (https://github.com/AiratBastanov/HackMaxBot2026/blob/32127a01e126658599e0da4d0ca4de59af52752a/openapi.json), DATA-API (https://github.com/AiratBastanov/HackMaxBot2026/blob/32127a01e126658599e0da4d0ca4de59af52752a/DATA-API.yaml), страницы 9–10 задания. Локальное демо использует синтетический каталог и симулятор MAX; Docker не заменяет работающий бот. Презентационный архив не является заново собранным полным комплектом приложения.</a:t>
+              <a:t>Передаём PDF и действительно редактируемые PPTX, общий источник слайдов, заметки, каталог с review и инструкции организатора. Защитный архив — материалы и данные; приложение запускается из указанного commit полного репозитория. В самостоятельной установке нужны собственные токен/identity, CA и отдельные данные по README. Пакет не содержит секретов или личной базы.</a:t>
             </a:r>
           </a:p>
         </p:txBody>
@@ -736,13 +724,7 @@
           <a:lstStyle/>
           <a:p>
             <a:r>
-              <a:t>Цель — завершить рассказ возможностями и честными границами. «Подбор и личные закладки реализованы. Следующая работа — более полные данные и постоянная служба для оценки». Часть афиши, неизвестные цены/допуск, непроверенные билеты и операторское обновление остаются ограничениями.</a:t>
-            </a:r>
-          </a:p>
-          <a:p/>
-          <a:p>
-            <a:r>
-              <a:t>Основания: инвентаризация (https://github.com/AiratBastanov/HackMaxBot2026/blob/32127a01e126658599e0da4d0ca4de59af52752a/docs/SOURCE_INVENTORY.md), квитанция 21 (https://github.com/AiratBastanov/HackMaxBot2026/blob/32127a01e126658599e0da4d0ca4de59af52752a/docs/pivot/21_PUBLIC_ACCESS_CATALOG_AND_HANDOFF.md), текущий перечень клиентских утверждений (https://github.com/AiratBastanov/HackMaxBot2026/blob/32127a01e126658599e0da4d0ca4de59af52752a/docs/EXPLORATORY_MAX_RUNBOOK.md#c-текущий-assertion-ledger-и-ограниченная-delta). Новая проверка в мобильном и веб-клиенте отложена пользователем; старые наблюдения не выданы за проверку этой версии.</a:t>
+              <a:t>«Подбор и закладки работают с каталогом 11 городов; дата, состав и неизвестные условия видны». Не обещаем наличие билетов, полноту афиши или семейную цену при неизвестном тарифе. Ограничения измеренного набора — в брифинге (https://github.com/AiratBastanov/HackMaxBot2026/blob/main/docs/DEFENSE_BRIEF.md). Репозиторный указатель не установлен автоматически в работающий бот. Следующий операционный шаг и сроки свежести вынесены в передачу (https://github.com/AiratBastanov/HackMaxBot2026/blob/main/docs/SUBMISSION_READINESS.md); во время этой задачи установка не выполняется.</a:t>
             </a:r>
           </a:p>
         </p:txBody>
@@ -812,7 +794,7 @@
           <a:lstStyle/>
           <a:p>
             <a:r>
-              <a:t>Цель — дать читаемые ссылки на пять учреждений, документацию MAX, код и доказательства. Названия и адреса взяты из инвентаризации (https://github.com/AiratBastanov/HackMaxBot2026/blob/32127a01e126658599e0da4d0ca4de59af52752a/docs/SOURCE_INVENTORY.md) и реестра источников (https://github.com/AiratBastanov/HackMaxBot2026/blob/32127a01e126658599e0da4d0ca4de59af52752a/docs/00_REQUIREMENTS_AND_EVIDENCE.md). Требования прочитаны из локального оригинала; он не публикуется. Сайты афиши повторно не обходились. Логотипы, фотографии и редакционные описания учреждений не использованы; партнёрства не заявлены.</a:t>
+              <a:t>Пять представительных учреждений на слайде показывают разные регионы; полный перечень всех 26 — по ссылке. Это источники фактов, не коммерческие партнёры. Проверки и версия приложения привязаны к полному commit, актуальные инструкции доступны в репозитории. Задание организатора использовано локально и в публичный комплект не включено.</a:t>
             </a:r>
           </a:p>
         </p:txBody>
@@ -882,7 +864,7 @@
           <a:lstStyle/>
           <a:p>
             <a:r>
-              <a:t>Цель — показать конкретный контекст и отличие от ручного поиска. «Человеку нужны не все события города, а вариант в свободное окно и в бюджет. В диалоге условия сопоставляются явно, а выбор можно сохранить». Это аргументированное допущение, не интервью и не измерение времени. Основания: инвентаризация (https://github.com/AiratBastanov/HackMaxBot2026/blob/32127a01e126658599e0da4d0ca4de59af52752a/docs/SOURCE_INVENTORY.md), текущий сценарий (https://github.com/AiratBastanov/HackMaxBot2026/blob/32127a01e126658599e0da4d0ca4de59af52752a/README.md); критерии организатора, страница 12. Сравнение касается способов поиска, а не неподтверждённых недостатков конкурентов.</a:t>
+              <a:t>«Нужно сопоставить свободное время, цену входа и условия разных учреждений. Бот собирает эти факты в одном диалоге, показывает неизвестное отдельно и сохраняет выбор». Это продуктовая гипотеза о пользе, не результат интервью или сравнения конверсии. Любая дата и любое время снимают соответствующее ограничение пользователя, но поиск остаётся в доступной афише. Тип события виден после названия; источник доступен из карточки.</a:t>
             </a:r>
           </a:p>
         </p:txBody>
@@ -952,13 +934,13 @@
           <a:lstStyle/>
           <a:p>
             <a:r>
-              <a:t>Цель — пройти путь от условий к выбранному и сохранённому событию. «Для одного взрослого в Казани, 27 сентября с 12 до 18 и до 500 ₽, в записанном запросе есть два совпадения. У выставки “Гелий Коржев. Свет и тень” известен взрослый билет 400 ₽; регистрацию и билеты ещё надо уточнить».</a:t>
+              <a:t>Сохраняем понятную историческую иллюстрацию: Казань, 27.09.2026, 12–18, один взрослый, до 500 ₽. В записанном запросе были два строгих совпадения; «Гелий Коржев. Свет и тень» — взрослый билет 400 ₽. Выставка завершалась 27 сентября, поэтому это не рекомендация на день просмотра.</a:t>
             </a:r>
           </a:p>
           <a:p/>
           <a:p>
             <a:r>
-              <a:t>Основания: записанные запросы (https://github.com/AiratBastanov/HackMaxBot2026/blob/32127a01e126658599e0da4d0ca4de59af52752a/docs/evidence/public-handoff/coverage.json), первый запрос; снимок (https://github.com/AiratBastanov/HackMaxBot2026/blob/32127a01e126658599e0da4d0ca4de59af52752a/catalog/real/e9f43ed9d1fd3c408584.json), соответствующее событие; тексты и кнопки (https://github.com/AiratBastanov/HackMaxBot2026/blob/32127a01e126658599e0da4d0ca4de59af52752a/src/culture/flow.ts), карточка (https://github.com/AiratBastanov/HackMaxBot2026/blob/32127a01e126658599e0da4d0ca4de59af52752a/src/culture/card.ts). Последний день выставки — 27.09.2026. Касса до 17:30 не подтверждает последний вход. Номер здания не установлен. Схемы сокращают полный экран; состояние «Сохранено» поддержано кодом, но не означает нового фактического сохранения человеком. Пример не является свежей рекомендацией на день просмотра. Закладка не покупает билет и не регистрирует посетителя.</a:t>
+              <a:t>Основания: запросы 26.09 (https://github.com/AiratBastanov/HackMaxBot2026/blob/main/docs/evidence/public-handoff/coverage.json) и исторический снимок (https://github.com/AiratBastanov/HackMaxBot2026/blob/main/catalog/real/e9f43ed9d1fd3c408584.json). Касса до 17:30 не подтверждает последний вход. Регистрацию, билеты и точный адрес надо уточнить. «Сохранено» — схема поддержанного состояния, не новое человеческое наблюдение. Закладка не покупает билет. Современные примеры реального renderer — НОВАТ, CANTUS и библиотека Маяковского — сохранены в маршрутах 28.09 (https://github.com/AiratBastanov/HackMaxBot2026/blob/main/docs/evidence/multi-city/journeys.md).</a:t>
             </a:r>
           </a:p>
         </p:txBody>
@@ -1028,13 +1010,7 @@
           <a:lstStyle/>
           <a:p>
             <a:r>
-              <a:t>Цель — объяснить семейный бюджет и два типа результата. «Неизвестный детский тариф не позволяет вычислить цену на всех. Пользователь сам решает, смотреть ли такие варианты». Для двух взрослых и ребёнка семи лет до 1500 ₽ в записанных запросах нет строгих совпадений в обоих городах. Это не означает отсутствия культурного досуга для семей вообще.</a:t>
-            </a:r>
-          </a:p>
-          <a:p/>
-          <a:p>
-            <a:r>
-              <a:t>Основания: инвентаризация (https://github.com/AiratBastanov/HackMaxBot2026/blob/32127a01e126658599e0da4d0ca4de59af52752a/docs/SOURCE_INVENTORY.md), запросы (https://github.com/AiratBastanov/HackMaxBot2026/blob/32127a01e126658599e0da4d0ca4de59af52752a/docs/evidence/public-handoff/coverage.json), логика экранов (https://github.com/AiratBastanov/HackMaxBot2026/blob/32127a01e126658599e0da4d0ca4de59af52752a/src/culture/flow.ts). Правая схема — объяснение связанных состояний, а не дословная копия одного сообщения. Часы работы, конкретный сеанс, касса и последний вход различаются; возрастная маркировка не доказывает допуск.</a:t>
+              <a:t>«Учитываем взрослых и детей; показываем известную стоимость и условия, которые нужно уточнить». Строгое совпадение оценивается относительно заданных ограничений. Без ограничения бюджета неизвестная цена сама по себе не доказывает несоответствия; 413 strict в ANY-запросе не означают 413 известных цен. Детский тариф нельзя заменить взрослым или нулём. Возрастная маркировка не подтверждает все условия допуска. Часы, сеанс, закрытие кассы и последний вход — разные факты. Семейный пример и количественные ограничения собраны один раз в брифинге, раздел «Границы данных».</a:t>
             </a:r>
           </a:p>
         </p:txBody>
@@ -1104,13 +1080,13 @@
           <a:lstStyle/>
           <a:p>
             <a:r>
-              <a:t>Цель — объяснить происхождение и обработку данных. «62 самостоятельных события дают 93 варианта посещения: 75 сеансов и 18 выставочных периодов. Выставки не размножаются по дням». Сбор 26.09.2026, местное окно 26.09–25.10.2026, пять источников, Казань и Екатеринбург.</a:t>
+              <a:t>«Из публичных публикаций учреждений извлекаем минимальные факты, нормализуем, объединяем повторы, проверяем допустимость показа и формируем карточку со ссылкой». 858 событий — уникальные программы/выставки; 1 041 посещение — 985 сеансов и 56 выставочных периодов. Период не размножается на дни. 1 167 исходных строк — до объединения, не число событий. Покрытие (https://github.com/AiratBastanov/HackMaxBot2026/blob/main/docs/evidence/multi-city/coverage.json).</a:t>
             </a:r>
           </a:p>
           <a:p/>
           <a:p>
             <a:r>
-              <a:t>Основания: инвентаризация (https://github.com/AiratBastanov/HackMaxBot2026/blob/32127a01e126658599e0da4d0ca4de59af52752a/docs/SOURCE_INVENTORY.md), квитанция 21 (https://github.com/AiratBastanov/HackMaxBot2026/blob/32127a01e126658599e0da4d0ca4de59af52752a/docs/pivot/21_PUBLIC_ACCESS_CATALOG_AND_HANDOFF.md). Запуск сбора операторский; автоматического расписания и интеграции с API этих учреждений нет. Условия показа проверяются отдельно по источникам; публикация страницы не равна лицензии на весь контент. Статистика не доказывает, что все события ещё предстоят.</a:t>
+              <a:t>Используются HTML, структурированные данные внутри страниц и рассмотренные публичные интерфейсы конкретных источников. Публичная страница не автоматически API или лицензия. Для каждого источника есть отдельное решение PUBLIC_FACTS и проверка hash/review; фотографии и статьи не копируются. Оператор запускает автоматическое извлечение; планировщика пока нет. Подробный реестр (https://github.com/AiratBastanov/HackMaxBot2026/blob/main/docs/SOURCE_INVENTORY.md).</a:t>
             </a:r>
           </a:p>
         </p:txBody>
@@ -1180,13 +1156,7 @@
           <a:lstStyle/>
           <a:p>
             <a:r>
-              <a:t>Цель — показать доступ и контроль над своим выбором. «Предварительное одобрение оператора не нужно. Закладки личные, удаление подтверждается отдельно». Два действия: запросить удаление, затем подтвердить; есть отмена. Хранятся также технические идентификаторы, поэтому анонимность не заявляется. История MAX и старые резервные копии отдельно не стираются.</a:t>
-            </a:r>
-          </a:p>
-          <a:p/>
-          <a:p>
-            <a:r>
-              <a:t>Основания: политика данных (https://github.com/AiratBastanov/HackMaxBot2026/blob/32127a01e126658599e0da4d0ca4de59af52752a/docs/PRIVACY.md), сценарий сохранения/удаления (https://github.com/AiratBastanov/HackMaxBot2026/blob/32127a01e126658599e0da4d0ca4de59af52752a/src/culture/flow.ts), квитанция 21 (https://github.com/AiratBastanov/HackMaxBot2026/blob/32127a01e126658599e0da4d0ca4de59af52752a/docs/pivot/21_PUBLIC_ACCESS_CATALOG_AND_HANDOFF.md). Схема списка — допустимое состояние, а не новый пользовательский снимок. Открытый режим приложения не доказывает постоянную доступность размещённого бота.</a:t>
+              <a:t>Обычный пользователь начинает диалог без предварительного допуска оператором. Настройки и закладки личные; можно сохранить разные даты, сеансы и составы. Точный повтор открывает сохранённый вариант. Схема показывает историческую запись 27 сентября, а не свежую рекомендацию. Удаление своих данных требует подтверждения, не стирает историю MAX и старые резервные копии. Это не обещание анонимности. Приватность (https://github.com/AiratBastanov/HackMaxBot2026/blob/main/docs/PRIVACY.md).</a:t>
             </a:r>
           </a:p>
         </p:txBody>
@@ -1256,13 +1226,7 @@
           <a:lstStyle/>
           <a:p>
             <a:r>
-              <a:t>Цель — объяснить архитектуру через функции. «MAX принимает диалог, сервер обрабатывает условия, каталог даёт факты, SQLite хранит личные настройки и закладки». Технологии вынесены отдельно, чтобы не перегружать схему.</a:t>
-            </a:r>
-          </a:p>
-          <a:p/>
-          <a:p>
-            <a:r>
-              <a:t>Основания: README (https://github.com/AiratBastanov/HackMaxBot2026/blob/32127a01e126658599e0da4d0ca4de59af52752a/README.md), OpenAPI (https://github.com/AiratBastanov/HackMaxBot2026/blob/32127a01e126658599e0da4d0ca4de59af52752a/openapi.json), квитанция 21 (https://github.com/AiratBastanov/HackMaxBot2026/blob/32127a01e126658599e0da4d0ca4de59af52752a/docs/pivot/21_PUBLIC_ACCESS_CATALOG_AND_HANDOFF.md). Для оценки есть профиль опроса MAX; для постоянной работы подготовлен профиль вебхука. Диаграмма логическая: она не изображает уже размещённое облако или запущенный сейчас процесс.</a:t>
+              <a:t>MAX передаёт запрос, сервер оценивает условия, каталог объединяет допущенные части по городу и источнику, SQLite хранит параметры и закладки. Истечение одного источника не выключает остальные. Для показа и открытия сохранённого выбора проверяются источник, snapshot/hash и срок. TypeScript, Fastify, SQLite и Docker уже используются; новых технологий не заявляем. Профиль webhook подготовлен, постоянное размещение ещё не выполнено. Схема логическая, не изображение уже работающего облака.</a:t>
             </a:r>
           </a:p>
         </p:txBody>
@@ -1332,13 +1296,13 @@
           <a:lstStyle/>
           <a:p>
             <a:r>
-              <a:t>Цель — связать тестирование с ценой ошибки для человека. «Проверяем, что неизвестная цена не станет обещанием, закладки переживут перезапуск, чужие данные не смешаются, а сбой будет понятен». В интерфейсе предусмотрены заметное сообщение о сохранении и отдельные сообщения об устаревшей карточке, неверном вводе или недоступных данных.</a:t>
+              <a:t>В кампании 28.09 прошёл 341 автоматический тест: парсеры, даты, тарифы, дубли, правила подбора, допуск/свежесть, хранение и ошибки. Отдельно проверены 42 образца источников и 11 маршрутов с настоящими SQLite/worker/outbox и симулированным MAX. Это записанное доказательство; при обновлении защиты проверки приложения не повторялись. Отчёт (https://github.com/AiratBastanov/HackMaxBot2026/blob/main/docs/verification/MULTI_CITY_CATALOG.md).</a:t>
             </a:r>
           </a:p>
           <a:p/>
           <a:p>
             <a:r>
-              <a:t>Основания: квитанция 21 (https://github.com/AiratBastanov/HackMaxBot2026/blob/32127a01e126658599e0da4d0ca4de59af52752a/docs/pivot/21_PUBLIC_ACCESS_CATALOG_AND_HANDOFF.md), сводка проверки (https://github.com/AiratBastanov/HackMaxBot2026/blob/32127a01e126658599e0da4d0ca4de59af52752a/docs/evidence/public-handoff/verification.json), сообщения интерфейса (https://github.com/AiratBastanov/HackMaxBot2026/blob/32127a01e126658599e0da4d0ca4de59af52752a/src/culture/flow.ts). 257 — зафиксированный результат; последующие 29 проверок повторяют часть набора. Нового запуска тестов приложения в этой задаче нет. Автоматическое доказательство не объявлено человеческим наблюдением MAX. Измерение Docker сознательно не включено в рассказ: оно не доказывает постоянную доступность службы.</a:t>
+              <a:t>Локальное время самого долгого запроса селектора — 39,06 мс; полный отдельный процесс матрицы — 1 438 мс на измеренном наборе/окружении. Это не задержка ответа MAX, нагрузочный SLA или доказательство доступности. Замеры в byCity и benchmark относятся к записанным проходам, их не смешиваем. Новая кешированная сборка Docker не подменяет историческое измерение чистой сборки. Человеческие mobile/web-статусы сохранены без нового PASS.</a:t>
             </a:r>
           </a:p>
         </p:txBody>
@@ -1408,13 +1372,7 @@
           <a:lstStyle/>
           <a:p>
             <a:r>
-              <a:t>Цель — показать развитие с зависимостями. «Сначала полнота и тарифы в двух городах, затем новые источники и города, после — разрешённые API событийных сайтов и обновления по расписанию». Потребуются доступ, условия, полезные поля/фильтры и частота обновления; неполнота данных останется явной.</a:t>
-            </a:r>
-          </a:p>
-          <a:p/>
-          <a:p>
-            <a:r>
-              <a:t>Основания текущих границ: инвентаризация (https://github.com/AiratBastanov/HackMaxBot2026/blob/32127a01e126658599e0da4d0ca4de59af52752a/docs/SOURCE_INVENTORY.md), README (https://github.com/AiratBastanov/HackMaxBot2026/blob/32127a01e126658599e0da4d0ca4de59af52752a/README.md). Направление API явно запрошено пользователем; это будущий путь, не уже полученные ключи или партнёрство. Рост каталога отделён от ёмкости сервера: нагрузочные результаты и горизонтальное масштабирование не заявлены. Критерий организатора — страница 12.</a:t>
+              <a:t>Переход от двух к 11 городам реализован. Перечень на слайде показывает широту одного сценария: разные площадки, источники и часовые пояса. Это не полнота каждой городской афиши. Дальше — глубина местного покрытия, применимые тарифы/часы, доступ к разрешённым API и обновление по расписанию. Для API потребуются согласованные условия, поля, фильтры и частота. Нагрузка и инфраструктура оцениваются отдельно.</a:t>
             </a:r>
           </a:p>
         </p:txBody>
@@ -4518,7 +4476,7 @@
       </p:sp>
       <p:sp>
         <p:nvSpPr>
-          <p:cNvPr id="4" name="P01 · Культурные события по вашему времени, бюджету и составу посетителей"/>
+          <p:cNvPr id="4" name="P01 · События по времени и бюджету."/>
           <p:cNvSpPr txBox="1"/>
           <p:nvPr/>
         </p:nvSpPr>
@@ -4559,7 +4517,7 @@
                 </a:solidFill>
                 <a:latin typeface="Segoe UI"/>
               </a:rPr>
-              <a:t>Культурные события по вашему времени,</a:t>
+              <a:t>События по времени и бюджету.</a:t>
             </a:r>
             <a:br/>
             <a:r>
@@ -4569,21 +4527,21 @@
                 </a:solidFill>
                 <a:latin typeface="Segoe UI"/>
               </a:rPr>
-              <a:t>бюджету и составу посетителей</a:t>
-            </a:r>
-          </a:p>
-        </p:txBody>
-      </p:sp>
-      <p:sp>
-        <p:nvSpPr>
-          <p:cNvPr id="5" name="P01 · Участники"/>
+              <a:t>Личный выбор — в MAX.</a:t>
+            </a:r>
+          </a:p>
+        </p:txBody>
+      </p:sp>
+      <p:sp>
+        <p:nvSpPr>
+          <p:cNvPr id="5" name="P01 · 11 городов · 26 источников · 858 событий"/>
           <p:cNvSpPr txBox="1"/>
           <p:nvPr/>
         </p:nvSpPr>
         <p:spPr>
           <a:xfrm>
-            <a:off x="647700" y="4851400"/>
-            <a:ext cx="6540500" cy="270271"/>
+            <a:off x="647700" y="4127500"/>
+            <a:ext cx="7086600" cy="371623"/>
           </a:xfrm>
           <a:prstGeom prst="rect">
             <a:avLst/>
@@ -4591,7 +4549,7 @@
           <a:noFill/>
         </p:spPr>
         <p:txBody>
-          <a:bodyPr wrap="none" lIns="0" rIns="0" tIns="32512" bIns="0" anchor="t">
+          <a:bodyPr wrap="none" lIns="0" rIns="0" tIns="44704" bIns="0" anchor="t">
             <a:noAutofit/>
           </a:bodyPr>
           <a:lstStyle/>
@@ -4606,32 +4564,32 @@
               <a:spcAft>
                 <a:spcPts val="0"/>
               </a:spcAft>
-              <a:defRPr sz="1600">
+              <a:defRPr sz="2200">
                 <a:latin typeface="Segoe UI"/>
               </a:defRPr>
             </a:pPr>
             <a:r>
-              <a:rPr sz="1600" b="0" i="0" u="none" lang="ru-RU" kern="120000">
-                <a:solidFill>
-                  <a:srgbClr val="C4DCDA"/>
-                </a:solidFill>
-                <a:latin typeface="Segoe UI"/>
-              </a:rPr>
-              <a:t>Участники</a:t>
-            </a:r>
-          </a:p>
-        </p:txBody>
-      </p:sp>
-      <p:sp>
-        <p:nvSpPr>
-          <p:cNvPr id="6" name="P01 · Садыков Булат"/>
+              <a:rPr sz="2200" b="1" i="0" u="none" lang="ru-RU" kern="120000">
+                <a:solidFill>
+                  <a:srgbClr val="FFFFFF"/>
+                </a:solidFill>
+                <a:latin typeface="Segoe UI"/>
+              </a:rPr>
+              <a:t>11 городов · 26 источников · 858 событий</a:t>
+            </a:r>
+          </a:p>
+        </p:txBody>
+      </p:sp>
+      <p:sp>
+        <p:nvSpPr>
+          <p:cNvPr id="6" name="P01 · Измерение каталога 28.09.2026"/>
           <p:cNvSpPr txBox="1"/>
           <p:nvPr/>
         </p:nvSpPr>
         <p:spPr>
           <a:xfrm>
-            <a:off x="647700" y="5232400"/>
-            <a:ext cx="6540500" cy="337839"/>
+            <a:off x="647700" y="4546600"/>
+            <a:ext cx="7086600" cy="253379"/>
           </a:xfrm>
           <a:prstGeom prst="rect">
             <a:avLst/>
@@ -4639,7 +4597,7 @@
           <a:noFill/>
         </p:spPr>
         <p:txBody>
-          <a:bodyPr wrap="none" lIns="0" rIns="0" tIns="40640" bIns="0" anchor="t">
+          <a:bodyPr wrap="none" lIns="0" rIns="0" tIns="30480" bIns="0" anchor="t">
             <a:noAutofit/>
           </a:bodyPr>
           <a:lstStyle/>
@@ -4654,32 +4612,32 @@
               <a:spcAft>
                 <a:spcPts val="0"/>
               </a:spcAft>
-              <a:defRPr sz="2000">
+              <a:defRPr sz="1500">
                 <a:latin typeface="Segoe UI"/>
               </a:defRPr>
             </a:pPr>
             <a:r>
-              <a:rPr sz="2000" b="0" i="0" u="none" lang="ru-RU" kern="120000">
-                <a:solidFill>
-                  <a:srgbClr val="FFFFFF"/>
-                </a:solidFill>
-                <a:latin typeface="Segoe UI"/>
-              </a:rPr>
-              <a:t>Садыков Булат</a:t>
-            </a:r>
-          </a:p>
-        </p:txBody>
-      </p:sp>
-      <p:sp>
-        <p:nvSpPr>
-          <p:cNvPr id="7" name="P01 · Бастанов Айрат"/>
+              <a:rPr sz="1500" b="0" i="0" u="none" lang="ru-RU" kern="120000">
+                <a:solidFill>
+                  <a:srgbClr val="C4DCDA"/>
+                </a:solidFill>
+                <a:latin typeface="Segoe UI"/>
+              </a:rPr>
+              <a:t>Измерение каталога 28.09.2026</a:t>
+            </a:r>
+          </a:p>
+        </p:txBody>
+      </p:sp>
+      <p:sp>
+        <p:nvSpPr>
+          <p:cNvPr id="7" name="P01 · Участники"/>
           <p:cNvSpPr txBox="1"/>
           <p:nvPr/>
         </p:nvSpPr>
         <p:spPr>
           <a:xfrm>
-            <a:off x="647700" y="5600700"/>
-            <a:ext cx="6540500" cy="337839"/>
+            <a:off x="647700" y="4851400"/>
+            <a:ext cx="6540500" cy="270271"/>
           </a:xfrm>
           <a:prstGeom prst="rect">
             <a:avLst/>
@@ -4687,7 +4645,7 @@
           <a:noFill/>
         </p:spPr>
         <p:txBody>
-          <a:bodyPr wrap="none" lIns="0" rIns="0" tIns="40640" bIns="0" anchor="t">
+          <a:bodyPr wrap="none" lIns="0" rIns="0" tIns="32512" bIns="0" anchor="t">
             <a:noAutofit/>
           </a:bodyPr>
           <a:lstStyle/>
@@ -4702,31 +4660,31 @@
               <a:spcAft>
                 <a:spcPts val="0"/>
               </a:spcAft>
-              <a:defRPr sz="2000">
+              <a:defRPr sz="1600">
                 <a:latin typeface="Segoe UI"/>
               </a:defRPr>
             </a:pPr>
             <a:r>
-              <a:rPr sz="2000" b="0" i="0" u="none" lang="ru-RU" kern="120000">
-                <a:solidFill>
-                  <a:srgbClr val="FFFFFF"/>
-                </a:solidFill>
-                <a:latin typeface="Segoe UI"/>
-              </a:rPr>
-              <a:t>Бастанов Айрат</a:t>
-            </a:r>
-          </a:p>
-        </p:txBody>
-      </p:sp>
-      <p:sp>
-        <p:nvSpPr>
-          <p:cNvPr id="8" name="P01 · Белова Маргарита"/>
+              <a:rPr sz="1600" b="0" i="0" u="none" lang="ru-RU" kern="120000">
+                <a:solidFill>
+                  <a:srgbClr val="C4DCDA"/>
+                </a:solidFill>
+                <a:latin typeface="Segoe UI"/>
+              </a:rPr>
+              <a:t>Участники</a:t>
+            </a:r>
+          </a:p>
+        </p:txBody>
+      </p:sp>
+      <p:sp>
+        <p:nvSpPr>
+          <p:cNvPr id="8" name="P01 · Садыков Булат"/>
           <p:cNvSpPr txBox="1"/>
           <p:nvPr/>
         </p:nvSpPr>
         <p:spPr>
           <a:xfrm>
-            <a:off x="647700" y="5969000"/>
+            <a:off x="647700" y="5232400"/>
             <a:ext cx="6540500" cy="337839"/>
           </a:xfrm>
           <a:prstGeom prst="rect">
@@ -4761,6 +4719,102 @@
                 </a:solidFill>
                 <a:latin typeface="Segoe UI"/>
               </a:rPr>
+              <a:t>Садыков Булат</a:t>
+            </a:r>
+          </a:p>
+        </p:txBody>
+      </p:sp>
+      <p:sp>
+        <p:nvSpPr>
+          <p:cNvPr id="9" name="P01 · Бастанов Айрат"/>
+          <p:cNvSpPr txBox="1"/>
+          <p:nvPr/>
+        </p:nvSpPr>
+        <p:spPr>
+          <a:xfrm>
+            <a:off x="647700" y="5600700"/>
+            <a:ext cx="6540500" cy="337839"/>
+          </a:xfrm>
+          <a:prstGeom prst="rect">
+            <a:avLst/>
+          </a:prstGeom>
+          <a:noFill/>
+        </p:spPr>
+        <p:txBody>
+          <a:bodyPr wrap="none" lIns="0" rIns="0" tIns="40640" bIns="0" anchor="t">
+            <a:noAutofit/>
+          </a:bodyPr>
+          <a:lstStyle/>
+          <a:p>
+            <a:pPr algn="l">
+              <a:lnSpc>
+                <a:spcPct val="101667"/>
+              </a:lnSpc>
+              <a:spcBef>
+                <a:spcPts val="0"/>
+              </a:spcBef>
+              <a:spcAft>
+                <a:spcPts val="0"/>
+              </a:spcAft>
+              <a:defRPr sz="2000">
+                <a:latin typeface="Segoe UI"/>
+              </a:defRPr>
+            </a:pPr>
+            <a:r>
+              <a:rPr sz="2000" b="0" i="0" u="none" lang="ru-RU" kern="120000">
+                <a:solidFill>
+                  <a:srgbClr val="FFFFFF"/>
+                </a:solidFill>
+                <a:latin typeface="Segoe UI"/>
+              </a:rPr>
+              <a:t>Бастанов Айрат</a:t>
+            </a:r>
+          </a:p>
+        </p:txBody>
+      </p:sp>
+      <p:sp>
+        <p:nvSpPr>
+          <p:cNvPr id="10" name="P01 · Белова Маргарита"/>
+          <p:cNvSpPr txBox="1"/>
+          <p:nvPr/>
+        </p:nvSpPr>
+        <p:spPr>
+          <a:xfrm>
+            <a:off x="647700" y="5969000"/>
+            <a:ext cx="6540500" cy="337839"/>
+          </a:xfrm>
+          <a:prstGeom prst="rect">
+            <a:avLst/>
+          </a:prstGeom>
+          <a:noFill/>
+        </p:spPr>
+        <p:txBody>
+          <a:bodyPr wrap="none" lIns="0" rIns="0" tIns="40640" bIns="0" anchor="t">
+            <a:noAutofit/>
+          </a:bodyPr>
+          <a:lstStyle/>
+          <a:p>
+            <a:pPr algn="l">
+              <a:lnSpc>
+                <a:spcPct val="101667"/>
+              </a:lnSpc>
+              <a:spcBef>
+                <a:spcPts val="0"/>
+              </a:spcBef>
+              <a:spcAft>
+                <a:spcPts val="0"/>
+              </a:spcAft>
+              <a:defRPr sz="2000">
+                <a:latin typeface="Segoe UI"/>
+              </a:defRPr>
+            </a:pPr>
+            <a:r>
+              <a:rPr sz="2000" b="0" i="0" u="none" lang="ru-RU" kern="120000">
+                <a:solidFill>
+                  <a:srgbClr val="FFFFFF"/>
+                </a:solidFill>
+                <a:latin typeface="Segoe UI"/>
+              </a:rPr>
               <a:t>Белова Маргарита</a:t>
             </a:r>
           </a:p>
@@ -4768,7 +4822,7 @@
       </p:sp>
       <p:sp>
         <p:nvSpPr>
-          <p:cNvPr id="9" name="P01 · Блок 8"/>
+          <p:cNvPr id="11" name="P01 · Блок 10"/>
           <p:cNvSpPr/>
           <p:nvPr/>
         </p:nvSpPr>
@@ -4798,7 +4852,7 @@
       </p:sp>
       <p:grpSp>
         <p:nvGrpSpPr>
-          <p:cNvPr id="27" name="P01 · Блок схемы"/>
+          <p:cNvPr id="29" name="P01 · Блок схемы"/>
           <p:cNvGrpSpPr/>
           <p:nvPr/>
         </p:nvGrpSpPr>
@@ -4812,7 +4866,7 @@
         </p:grpSpPr>
         <p:sp>
           <p:nvSpPr>
-            <p:cNvPr id="10" name="P01 · Блок 9"/>
+            <p:cNvPr id="12" name="P01 · Блок 11"/>
             <p:cNvSpPr/>
             <p:nvPr/>
           </p:nvSpPr>
@@ -4842,7 +4896,7 @@
         </p:sp>
         <p:sp>
           <p:nvSpPr>
-            <p:cNvPr id="11" name="P01 · Блок 10"/>
+            <p:cNvPr id="13" name="P01 · Блок 12"/>
             <p:cNvSpPr/>
             <p:nvPr/>
           </p:nvSpPr>
@@ -4873,7 +4927,7 @@
       </p:grpSp>
       <p:sp>
         <p:nvSpPr>
-          <p:cNvPr id="12" name="P01 · Блок 11"/>
+          <p:cNvPr id="14" name="P01 · Блок 13"/>
           <p:cNvSpPr/>
           <p:nvPr/>
         </p:nvSpPr>
@@ -4903,7 +4957,7 @@
       </p:sp>
       <p:sp>
         <p:nvSpPr>
-          <p:cNvPr id="13" name="P01 · Блок 12"/>
+          <p:cNvPr id="15" name="P01 · Блок 14"/>
           <p:cNvSpPr/>
           <p:nvPr/>
         </p:nvSpPr>
@@ -4933,7 +4987,7 @@
       </p:sp>
       <p:sp>
         <p:nvSpPr>
-          <p:cNvPr id="14" name="P01 · Ваш выходной"/>
+          <p:cNvPr id="16" name="P01 · Ваш выбор"/>
           <p:cNvSpPr txBox="1"/>
           <p:nvPr/>
         </p:nvSpPr>
@@ -4974,14 +5028,14 @@
                 </a:solidFill>
                 <a:latin typeface="Segoe UI"/>
               </a:rPr>
-              <a:t>Ваш выходной</a:t>
-            </a:r>
-          </a:p>
-        </p:txBody>
-      </p:sp>
-      <p:sp>
-        <p:nvSpPr>
-          <p:cNvPr id="15" name="P01 · 27"/>
+              <a:t>Ваш выбор</a:t>
+            </a:r>
+          </a:p>
+        </p:txBody>
+      </p:sp>
+      <p:sp>
+        <p:nvSpPr>
+          <p:cNvPr id="17" name="P01 · 28"/>
           <p:cNvSpPr txBox="1"/>
           <p:nvPr/>
         </p:nvSpPr>
@@ -5022,14 +5076,14 @@
                 </a:solidFill>
                 <a:latin typeface="Segoe UI"/>
               </a:rPr>
-              <a:t>27</a:t>
-            </a:r>
-          </a:p>
-        </p:txBody>
-      </p:sp>
-      <p:sp>
-        <p:nvSpPr>
-          <p:cNvPr id="16" name="P01 · сентября"/>
+              <a:t>28</a:t>
+            </a:r>
+          </a:p>
+        </p:txBody>
+      </p:sp>
+      <p:sp>
+        <p:nvSpPr>
+          <p:cNvPr id="18" name="P01 · сентября"/>
           <p:cNvSpPr txBox="1"/>
           <p:nvPr/>
         </p:nvSpPr>
@@ -5077,7 +5131,7 @@
       </p:sp>
       <p:cxnSp>
         <p:nvCxnSpPr>
-          <p:cNvPr id="17" name="P01 · Соединитель 16"/>
+          <p:cNvPr id="19" name="P01 · Соединитель 18"/>
           <p:cNvCxnSpPr/>
           <p:nvPr/>
         </p:nvCxnSpPr>
@@ -5099,7 +5153,7 @@
       </p:cxnSp>
       <p:sp>
         <p:nvSpPr>
-          <p:cNvPr id="18" name="P01 · Время для культуры"/>
+          <p:cNvPr id="20" name="P01 · Время для культуры"/>
           <p:cNvSpPr txBox="1"/>
           <p:nvPr/>
         </p:nvSpPr>
@@ -5147,7 +5201,7 @@
       </p:sp>
       <p:sp>
         <p:nvSpPr>
-          <p:cNvPr id="19" name="P01 · Блок 18"/>
+          <p:cNvPr id="21" name="P01 · Блок 20"/>
           <p:cNvSpPr/>
           <p:nvPr/>
         </p:nvSpPr>
@@ -5177,7 +5231,7 @@
       </p:sp>
       <p:sp>
         <p:nvSpPr>
-          <p:cNvPr id="20" name="P01 · Когда"/>
+          <p:cNvPr id="22" name="P01 · Когда"/>
           <p:cNvSpPr txBox="1"/>
           <p:nvPr/>
         </p:nvSpPr>
@@ -5225,7 +5279,7 @@
       </p:sp>
       <p:sp>
         <p:nvSpPr>
-          <p:cNvPr id="21" name="P01 · Блок 20"/>
+          <p:cNvPr id="23" name="P01 · Блок 22"/>
           <p:cNvSpPr/>
           <p:nvPr/>
         </p:nvSpPr>
@@ -5255,7 +5309,7 @@
       </p:sp>
       <p:sp>
         <p:nvSpPr>
-          <p:cNvPr id="22" name="P01 · С кем"/>
+          <p:cNvPr id="24" name="P01 · С кем"/>
           <p:cNvSpPr txBox="1"/>
           <p:nvPr/>
         </p:nvSpPr>
@@ -5303,7 +5357,7 @@
       </p:sp>
       <p:sp>
         <p:nvSpPr>
-          <p:cNvPr id="23" name="P01 · Блок 22"/>
+          <p:cNvPr id="25" name="P01 · Блок 24"/>
           <p:cNvSpPr/>
           <p:nvPr/>
         </p:nvSpPr>
@@ -5333,7 +5387,7 @@
       </p:sp>
       <p:sp>
         <p:nvSpPr>
-          <p:cNvPr id="24" name="P01 · Бюджет"/>
+          <p:cNvPr id="26" name="P01 · Бюджет"/>
           <p:cNvSpPr txBox="1"/>
           <p:nvPr/>
         </p:nvSpPr>
@@ -5381,7 +5435,7 @@
       </p:sp>
       <p:sp>
         <p:nvSpPr>
-          <p:cNvPr id="25" name="P01 · Хакатон MAX · 2026"/>
+          <p:cNvPr id="27" name="P01 · Хакатон MAX · 2026"/>
           <p:cNvSpPr txBox="1"/>
           <p:nvPr/>
         </p:nvSpPr>
@@ -5429,7 +5483,7 @@
       </p:sp>
       <p:sp>
         <p:nvSpPr>
-          <p:cNvPr id="26" name="P01 · Трек «Досуг и развлечения»"/>
+          <p:cNvPr id="28" name="P01 · Трек «Досуг и развлечения»"/>
           <p:cNvSpPr txBox="1"/>
           <p:nvPr/>
         </p:nvSpPr>
@@ -6759,7 +6813,7 @@
       </p:sp>
       <p:sp>
         <p:nvSpPr>
-          <p:cNvPr id="13" name="P11 · Данные и примеры"/>
+          <p:cNvPr id="13" name="P11 · Каталог"/>
           <p:cNvSpPr txBox="1"/>
           <p:nvPr/>
         </p:nvSpPr>
@@ -6800,7 +6854,7 @@
                 </a:solidFill>
                 <a:latin typeface="Segoe UI"/>
               </a:rPr>
-              <a:t>Данные и примеры</a:t>
+              <a:t>Каталог</a:t>
             </a:r>
             <a:br/>
             <a:r>
@@ -6810,14 +6864,14 @@
                 </a:solidFill>
                 <a:latin typeface="Segoe UI"/>
               </a:rPr>
-              <a:t>для проверки</a:t>
-            </a:r>
-          </a:p>
-        </p:txBody>
-      </p:sp>
-      <p:sp>
-        <p:nvSpPr>
-          <p:cNvPr id="14" name="P11 · Реальный снимок"/>
+              <a:t>и примеры</a:t>
+            </a:r>
+          </a:p>
+        </p:txBody>
+      </p:sp>
+      <p:sp>
+        <p:nvSpPr>
+          <p:cNvPr id="14" name="P11 · Снимок 28.09.2026"/>
           <p:cNvSpPr txBox="1"/>
           <p:nvPr/>
         </p:nvSpPr>
@@ -6858,7 +6912,7 @@
                 </a:solidFill>
                 <a:latin typeface="Segoe UI"/>
               </a:rPr>
-              <a:t>Реальный снимок</a:t>
+              <a:t>Снимок 28.09.2026</a:t>
             </a:r>
             <a:br/>
             <a:r>
@@ -7011,7 +7065,7 @@
       </p:sp>
       <p:sp>
         <p:nvSpPr>
-          <p:cNvPr id="18" name="P11 · PDF и исходник слайдов;"/>
+          <p:cNvPr id="18" name="P11 · PDF и редактируемый PPTX;"/>
           <p:cNvSpPr txBox="1"/>
           <p:nvPr/>
         </p:nvSpPr>
@@ -7052,7 +7106,7 @@
                 </a:solidFill>
                 <a:latin typeface="Segoe UI"/>
               </a:rPr>
-              <a:t>PDF и исходник слайдов;</a:t>
+              <a:t>PDF и редактируемый PPTX;</a:t>
             </a:r>
             <a:br/>
             <a:r>
@@ -7590,7 +7644,7 @@
       </p:sp>
       <p:sp>
         <p:nvSpPr>
-          <p:cNvPr id="3" name="P12 · Подбор и личные"/>
+          <p:cNvPr id="3" name="P12 · Подбор и закладки"/>
           <p:cNvSpPr txBox="1"/>
           <p:nvPr/>
         </p:nvSpPr>
@@ -7631,7 +7685,7 @@
                 </a:solidFill>
                 <a:latin typeface="Segoe UI"/>
               </a:rPr>
-              <a:t>Подбор и личные</a:t>
+              <a:t>Подбор и закладки</a:t>
             </a:r>
             <a:br/>
             <a:r>
@@ -7641,7 +7695,7 @@
                 </a:solidFill>
                 <a:latin typeface="Segoe UI"/>
               </a:rPr>
-              <a:t>закладки реализованы</a:t>
+              <a:t>для 11 городов</a:t>
             </a:r>
           </a:p>
         </p:txBody>
@@ -7696,7 +7750,7 @@
       </p:sp>
       <p:sp>
         <p:nvSpPr>
-          <p:cNvPr id="5" name="P12 · Дата и состав видны"/>
+          <p:cNvPr id="5" name="P12 · Явные даты и состав"/>
           <p:cNvSpPr txBox="1"/>
           <p:nvPr/>
         </p:nvSpPr>
@@ -7737,7 +7791,7 @@
                 </a:solidFill>
                 <a:latin typeface="Segoe UI"/>
               </a:rPr>
-              <a:t>Дата и состав видны</a:t>
+              <a:t>Явные даты и состав</a:t>
             </a:r>
           </a:p>
         </p:txBody>
@@ -7792,7 +7846,7 @@
       </p:sp>
       <p:sp>
         <p:nvSpPr>
-          <p:cNvPr id="7" name="P12 · Неизвестные условия обозначены"/>
+          <p:cNvPr id="7" name="P12 · Неизвестное показано отдельно"/>
           <p:cNvSpPr txBox="1"/>
           <p:nvPr/>
         </p:nvSpPr>
@@ -7833,7 +7887,7 @@
                 </a:solidFill>
                 <a:latin typeface="Segoe UI"/>
               </a:rPr>
-              <a:t>Неизвестные условия обозначены</a:t>
+              <a:t>Неизвестное показано отдельно</a:t>
             </a:r>
           </a:p>
         </p:txBody>
@@ -8028,7 +8082,7 @@
         </p:sp>
         <p:sp>
           <p:nvSpPr>
-            <p:cNvPr id="12" name="P12 · Часть афиши двух городов"/>
+            <p:cNvPr id="12" name="P12 · Часть афиши 11 городов"/>
             <p:cNvSpPr txBox="1"/>
             <p:nvPr/>
           </p:nvSpPr>
@@ -8069,14 +8123,14 @@
                   </a:solidFill>
                   <a:latin typeface="Segoe UI"/>
                 </a:rPr>
-                <a:t>Часть афиши двух городов</a:t>
+                <a:t>Часть афиши 11 городов</a:t>
               </a:r>
             </a:p>
           </p:txBody>
         </p:sp>
         <p:sp>
           <p:nvSpPr>
-            <p:cNvPr id="13" name="P12 · Цены и допуск могут требовать"/>
+            <p:cNvPr id="13" name="P12 · Цены, часы и допуск требуют"/>
             <p:cNvSpPr txBox="1"/>
             <p:nvPr/>
           </p:nvSpPr>
@@ -8117,7 +8171,7 @@
                   </a:solidFill>
                   <a:latin typeface="Segoe UI"/>
                 </a:rPr>
-                <a:t>Цены и допуск могут требовать</a:t>
+                <a:t>Цены, часы и допуск требуют</a:t>
               </a:r>
               <a:br/>
               <a:r>
@@ -8182,7 +8236,7 @@
         </p:sp>
         <p:sp>
           <p:nvSpPr>
-            <p:cNvPr id="15" name="P12 · Постоянный хостинг и финальная"/>
+            <p:cNvPr id="15" name="P12 · Постоянная служба и текущий"/>
             <p:cNvSpPr txBox="1"/>
             <p:nvPr/>
           </p:nvSpPr>
@@ -8223,7 +8277,7 @@
                   </a:solidFill>
                   <a:latin typeface="Segoe UI"/>
                 </a:rPr>
-                <a:t>Постоянный хостинг и финальная</a:t>
+                <a:t>Постоянная служба и текущий</a:t>
               </a:r>
               <a:br/>
               <a:r>
@@ -8233,7 +8287,7 @@
                   </a:solidFill>
                   <a:latin typeface="Segoe UI"/>
                 </a:rPr>
-                <a:t>проверка в мобильном и веб-клиенте</a:t>
+                <a:t>интерфейс MAX mobile/web</a:t>
               </a:r>
               <a:br/>
               <a:r>
@@ -8243,7 +8297,7 @@
                   </a:solidFill>
                   <a:latin typeface="Segoe UI"/>
                 </a:rPr>
-                <a:t>MAX ещё предстоят</a:t>
+                <a:t>отдельно не подтверждены</a:t>
               </a:r>
             </a:p>
           </p:txBody>
@@ -8251,7 +8305,7 @@
       </p:grpSp>
       <p:sp>
         <p:nvSpPr>
-          <p:cNvPr id="16" name="P12 · Следующий шаг — расширить данные и подготовить постоянную оценку в MAX"/>
+          <p:cNvPr id="16" name="P12 · Далее — глубина местных данных и подготовка постоянной оценки в MAX"/>
           <p:cNvSpPr txBox="1"/>
           <p:nvPr/>
         </p:nvSpPr>
@@ -8292,7 +8346,7 @@
                 </a:solidFill>
                 <a:latin typeface="Segoe UI"/>
               </a:rPr>
-              <a:t>Следующий шаг — расширить данные и подготовить постоянную оценку в MAX</a:t>
+              <a:t>Далее — глубина местных данных и подготовка постоянной оценки в MAX</a:t>
             </a:r>
           </a:p>
         </p:txBody>
@@ -8469,7 +8523,7 @@
       </p:sp>
       <p:sp>
         <p:nvSpPr>
-          <p:cNvPr id="5" name="P13 · Казанский Кремль">
+          <p:cNvPr id="5" name="P13 · Казанский Кремль · Казань">
             <a:hlinkClick r:id="rId2"/>
           </p:cNvPr>
           <p:cNvSpPr txBox="1"/>
@@ -8512,7 +8566,7 @@
                 </a:solidFill>
                 <a:latin typeface="Segoe UI"/>
               </a:rPr>
-              <a:t>Казанский Кремль</a:t>
+              <a:t>Казанский Кремль · Казань</a:t>
             </a:r>
           </a:p>
         </p:txBody>
@@ -8617,7 +8671,7 @@
       </p:sp>
       <p:sp>
         <p:nvSpPr>
-          <p:cNvPr id="8" name="P13 · Национальный музей Республики Татарстан">
+          <p:cNvPr id="8" name="P13 · Библиотека Маяковского · Петербург">
             <a:hlinkClick r:id="rId3"/>
           </p:cNvPr>
           <p:cNvSpPr txBox="1"/>
@@ -8660,14 +8714,14 @@
                 </a:solidFill>
                 <a:latin typeface="Segoe UI"/>
               </a:rPr>
-              <a:t>Национальный музей Республики Татарстан</a:t>
-            </a:r>
-          </a:p>
-        </p:txBody>
-      </p:sp>
-      <p:sp>
-        <p:nvSpPr>
-          <p:cNvPr id="9" name="P13 · tatmuseum.ru/events">
+              <a:t>Библиотека Маяковского · Петербург</a:t>
+            </a:r>
+          </a:p>
+        </p:txBody>
+      </p:sp>
+      <p:sp>
+        <p:nvSpPr>
+          <p:cNvPr id="9" name="P13 · pl.spb.ru">
             <a:hlinkClick r:id="rId3"/>
           </p:cNvPr>
           <p:cNvSpPr txBox="1"/>
@@ -8710,7 +8764,7 @@
                 </a:solidFill>
                 <a:latin typeface="Segoe UI"/>
               </a:rPr>
-              <a:t>tatmuseum.ru/events</a:t>
+              <a:t>pl.spb.ru</a:t>
             </a:r>
           </a:p>
         </p:txBody>
@@ -8765,7 +8819,7 @@
       </p:sp>
       <p:sp>
         <p:nvSpPr>
-          <p:cNvPr id="11" name="P13 · Музей истории Екатеринбурга">
+          <p:cNvPr id="11" name="P13 · НОВАТ · Новосибирск">
             <a:hlinkClick r:id="rId4"/>
           </p:cNvPr>
           <p:cNvSpPr txBox="1"/>
@@ -8808,14 +8862,14 @@
                 </a:solidFill>
                 <a:latin typeface="Segoe UI"/>
               </a:rPr>
-              <a:t>Музей истории Екатеринбурга</a:t>
-            </a:r>
-          </a:p>
-        </p:txBody>
-      </p:sp>
-      <p:sp>
-        <p:nvSpPr>
-          <p:cNvPr id="12" name="P13 · m-i-e.ru">
+              <a:t>НОВАТ · Новосибирск</a:t>
+            </a:r>
+          </a:p>
+        </p:txBody>
+      </p:sp>
+      <p:sp>
+        <p:nvSpPr>
+          <p:cNvPr id="12" name="P13 · novat.ru">
             <a:hlinkClick r:id="rId4"/>
           </p:cNvPr>
           <p:cNvSpPr txBox="1"/>
@@ -8858,7 +8912,7 @@
                 </a:solidFill>
                 <a:latin typeface="Segoe UI"/>
               </a:rPr>
-              <a:t>m-i-e.ru</a:t>
+              <a:t>novat.ru</a:t>
             </a:r>
           </a:p>
         </p:txBody>
@@ -8913,7 +8967,7 @@
       </p:sp>
       <p:sp>
         <p:nvSpPr>
-          <p:cNvPr id="14" name="P13 · Урал Опера Балет">
+          <p:cNvPr id="14" name="P13 · Пермская опера · Пермь">
             <a:hlinkClick r:id="rId5"/>
           </p:cNvPr>
           <p:cNvSpPr txBox="1"/>
@@ -8956,14 +9010,14 @@
                 </a:solidFill>
                 <a:latin typeface="Segoe UI"/>
               </a:rPr>
-              <a:t>Урал Опера Балет</a:t>
-            </a:r>
-          </a:p>
-        </p:txBody>
-      </p:sp>
-      <p:sp>
-        <p:nvSpPr>
-          <p:cNvPr id="15" name="P13 · uralopera.ru">
+              <a:t>Пермская опера · Пермь</a:t>
+            </a:r>
+          </a:p>
+        </p:txBody>
+      </p:sp>
+      <p:sp>
+        <p:nvSpPr>
+          <p:cNvPr id="15" name="P13 · permopera.ru">
             <a:hlinkClick r:id="rId5"/>
           </p:cNvPr>
           <p:cNvSpPr txBox="1"/>
@@ -9006,7 +9060,7 @@
                 </a:solidFill>
                 <a:latin typeface="Segoe UI"/>
               </a:rPr>
-              <a:t>uralopera.ru</a:t>
+              <a:t>permopera.ru</a:t>
             </a:r>
           </a:p>
         </p:txBody>
@@ -9061,7 +9115,7 @@
       </p:sp>
       <p:sp>
         <p:nvSpPr>
-          <p:cNvPr id="17" name="P13 · Свердловская филармония">
+          <p:cNvPr id="17" name="P13 · Красноярская филармония">
             <a:hlinkClick r:id="rId6"/>
           </p:cNvPr>
           <p:cNvSpPr txBox="1"/>
@@ -9104,14 +9158,14 @@
                 </a:solidFill>
                 <a:latin typeface="Segoe UI"/>
               </a:rPr>
-              <a:t>Свердловская филармония</a:t>
-            </a:r>
-          </a:p>
-        </p:txBody>
-      </p:sp>
-      <p:sp>
-        <p:nvSpPr>
-          <p:cNvPr id="18" name="P13 · sgaf.ru">
+              <a:t>Красноярская филармония</a:t>
+            </a:r>
+          </a:p>
+        </p:txBody>
+      </p:sp>
+      <p:sp>
+        <p:nvSpPr>
+          <p:cNvPr id="18" name="P13 · krasfil.ru">
             <a:hlinkClick r:id="rId6"/>
           </p:cNvPr>
           <p:cNvSpPr txBox="1"/>
@@ -9154,7 +9208,7 @@
                 </a:solidFill>
                 <a:latin typeface="Segoe UI"/>
               </a:rPr>
-              <a:t>sgaf.ru</a:t>
+              <a:t>krasfil.ru</a:t>
             </a:r>
           </a:p>
         </p:txBody>
@@ -9453,7 +9507,7 @@
         </p:sp>
         <p:sp>
           <p:nvSpPr>
-            <p:cNvPr id="25" name="P13 · Каталог и ограничения">
+            <p:cNvPr id="25" name="P13 · Все 26 источников">
               <a:hlinkClick r:id="rId9"/>
             </p:cNvPr>
             <p:cNvSpPr txBox="1"/>
@@ -9496,14 +9550,14 @@
                   </a:solidFill>
                   <a:latin typeface="Segoe UI"/>
                 </a:rPr>
-                <a:t>Каталог и ограничения</a:t>
+                <a:t>Все 26 источников</a:t>
               </a:r>
             </a:p>
           </p:txBody>
         </p:sp>
         <p:sp>
           <p:nvSpPr>
-            <p:cNvPr id="26" name="P13 · Инвентаризация пяти источников">
+            <p:cNvPr id="26" name="P13 · Реестр и ограничения показа">
               <a:hlinkClick r:id="rId9"/>
             </p:cNvPr>
             <p:cNvSpPr txBox="1"/>
@@ -9546,7 +9600,7 @@
                   </a:solidFill>
                   <a:latin typeface="Segoe UI"/>
                 </a:rPr>
-                <a:t>Инвентаризация пяти источников</a:t>
+                <a:t>Реестр и ограничения показа</a:t>
               </a:r>
             </a:p>
           </p:txBody>
@@ -9603,7 +9657,7 @@
         </p:sp>
         <p:sp>
           <p:nvSpPr>
-            <p:cNvPr id="28" name="P13 · Квитанция 26.09.2026">
+            <p:cNvPr id="28" name="P13 · Локальная кампания 28.09.2026">
               <a:hlinkClick r:id="rId10"/>
             </p:cNvPr>
             <p:cNvSpPr txBox="1"/>
@@ -9646,7 +9700,7 @@
                   </a:solidFill>
                   <a:latin typeface="Segoe UI"/>
                 </a:rPr>
-                <a:t>Квитанция 26.09.2026</a:t>
+                <a:t>Локальная кампания 28.09.2026</a:t>
               </a:r>
             </a:p>
           </p:txBody>
@@ -10846,7 +10900,7 @@
       <p:grpSpPr/>
       <p:sp>
         <p:nvSpPr>
-          <p:cNvPr id="2" name="P03 · Выставка на воскресенье — с понятным выбором"/>
+          <p:cNvPr id="2" name="P03 · Выставка на воскресенье: пример выбора"/>
           <p:cNvSpPr txBox="1"/>
           <p:nvPr/>
         </p:nvSpPr>
@@ -10887,7 +10941,7 @@
                 </a:solidFill>
                 <a:latin typeface="Segoe UI"/>
               </a:rPr>
-              <a:t>Выставка на воскресенье — с понятным выбором</a:t>
+              <a:t>Выставка на воскресенье: пример выбора</a:t>
             </a:r>
           </a:p>
         </p:txBody>
@@ -12993,7 +13047,7 @@
       </p:grpSp>
       <p:sp>
         <p:nvSpPr>
-          <p:cNvPr id="59" name="P03 · Сокращённые схемы на данных сбора 26.09.2026; сохранение не покупает б"/>
+          <p:cNvPr id="59" name="P03 · Историческая схема: сбор 26.09.2026, визит 27.09.2026; закладка не пок"/>
           <p:cNvSpPr txBox="1"/>
           <p:nvPr/>
         </p:nvSpPr>
@@ -13034,7 +13088,7 @@
                 </a:solidFill>
                 <a:latin typeface="Segoe UI"/>
               </a:rPr>
-              <a:t>Сокращённые схемы на данных сбора 26.09.2026; сохранение не покупает билет</a:t>
+              <a:t>Историческая схема: сбор 26.09.2026, визит 27.09.2026; закладка не покупает билет</a:t>
             </a:r>
           </a:p>
         </p:txBody>
@@ -13211,7 +13265,7 @@
       </p:sp>
       <p:sp>
         <p:nvSpPr>
-          <p:cNvPr id="5" name="P04 · Где и в какой день пойдём"/>
+          <p:cNvPr id="5" name="P04 · Конкретная дата или «Любая дата»"/>
           <p:cNvSpPr txBox="1"/>
           <p:nvPr/>
         </p:nvSpPr>
@@ -13252,7 +13306,7 @@
                 </a:solidFill>
                 <a:latin typeface="Segoe UI"/>
               </a:rPr>
-              <a:t>Где и в какой день пойдём</a:t>
+              <a:t>Конкретная дата или «Любая дата»</a:t>
             </a:r>
           </a:p>
         </p:txBody>
@@ -13355,7 +13409,7 @@
       </p:sp>
       <p:sp>
         <p:nvSpPr>
-          <p:cNvPr id="8" name="P04 · Сеанс или часы посещения"/>
+          <p:cNvPr id="8" name="P04 · Интервал или «Любое время»"/>
           <p:cNvSpPr txBox="1"/>
           <p:nvPr/>
         </p:nvSpPr>
@@ -13396,7 +13450,7 @@
                 </a:solidFill>
                 <a:latin typeface="Segoe UI"/>
               </a:rPr>
-              <a:t>Сеанс или часы посещения</a:t>
+              <a:t>Интервал или «Любое время»</a:t>
             </a:r>
           </a:p>
         </p:txBody>
@@ -13793,7 +13847,7 @@
         </p:sp>
         <p:sp>
           <p:nvSpPr>
-            <p:cNvPr id="17" name="P04 · Известные время, цена и условия соответствуют запросу"/>
+            <p:cNvPr id="17" name="P04 · Известные условия отвечают"/>
             <p:cNvSpPr txBox="1"/>
             <p:nvPr/>
           </p:nvSpPr>
@@ -13834,7 +13888,7 @@
                   </a:solidFill>
                   <a:latin typeface="Segoe UI"/>
                 </a:rPr>
-                <a:t>Известные время, цена и условия</a:t>
+                <a:t>Известные условия отвечают</a:t>
               </a:r>
               <a:br/>
               <a:r>
@@ -13844,7 +13898,7 @@
                   </a:solidFill>
                   <a:latin typeface="Segoe UI"/>
                 </a:rPr>
-                <a:t>соответствуют запросу</a:t>
+                <a:t>заданным ограничениям запроса</a:t>
               </a:r>
             </a:p>
           </p:txBody>
@@ -13992,7 +14046,7 @@
         </p:sp>
         <p:sp>
           <p:nvSpPr>
-            <p:cNvPr id="22" name="P04 · 2 взрослых и ребёнок 7 лет · до 1500 ₽"/>
+            <p:cNvPr id="22" name="P04 · 2 взрослых и ребёнок 7 лет · до 3000 ₽"/>
             <p:cNvSpPr txBox="1"/>
             <p:nvPr/>
           </p:nvSpPr>
@@ -14033,7 +14087,7 @@
                   </a:solidFill>
                   <a:latin typeface="Segoe UI"/>
                 </a:rPr>
-                <a:t>2 взрослых и ребёнок 7 лет · до 1500 ₽</a:t>
+                <a:t>2 взрослых и ребёнок 7 лет · до 3000 ₽</a:t>
               </a:r>
               <a:br/>
               <a:r>
@@ -14176,7 +14230,7 @@
       </p:cxnSp>
       <p:sp>
         <p:nvSpPr>
-          <p:cNvPr id="27" name="P04 · Часы работы, время сеанса, закрытие кассы и последний вход — разные фа"/>
+          <p:cNvPr id="27" name="P04 · Учитываем взрослых и детей; показываем известную стоимость и что нужно"/>
           <p:cNvSpPr txBox="1"/>
           <p:nvPr/>
         </p:nvSpPr>
@@ -14217,7 +14271,7 @@
                 </a:solidFill>
                 <a:latin typeface="Segoe UI"/>
               </a:rPr>
-              <a:t>Часы работы, время сеанса, закрытие кассы и последний вход — разные факты</a:t>
+              <a:t>Учитываем взрослых и детей; показываем известную стоимость и что нужно уточнить</a:t>
             </a:r>
           </a:p>
         </p:txBody>
@@ -14602,7 +14656,7 @@
       </p:sp>
       <p:sp>
         <p:nvSpPr>
-          <p:cNvPr id="13" name="P05 · Исходная афиша"/>
+          <p:cNvPr id="13" name="P05 · Публичная афиша"/>
           <p:cNvSpPr txBox="1"/>
           <p:nvPr/>
         </p:nvSpPr>
@@ -14643,7 +14697,7 @@
                 </a:solidFill>
                 <a:latin typeface="Segoe UI"/>
               </a:rPr>
-              <a:t>Исходная афиша</a:t>
+              <a:t>Публичная афиша</a:t>
             </a:r>
             <a:br/>
             <a:r>
@@ -15445,7 +15499,7 @@
                 </a:solidFill>
                 <a:latin typeface="Segoe UI"/>
               </a:rPr>
-              <a:t>проверка дублей</a:t>
+              <a:t>дубли и допуск фактов</a:t>
             </a:r>
           </a:p>
         </p:txBody>
@@ -15829,14 +15883,14 @@
         </p:sp>
         <p:sp>
           <p:nvSpPr>
-            <p:cNvPr id="48" name="P05 · 62"/>
+            <p:cNvPr id="48" name="P05 · 858"/>
             <p:cNvSpPr txBox="1"/>
             <p:nvPr/>
           </p:nvSpPr>
           <p:spPr>
             <a:xfrm>
-              <a:off x="838200" y="5092700"/>
-              <a:ext cx="762000" cy="658787"/>
+              <a:off x="838200" y="5067300"/>
+              <a:ext cx="2413000" cy="658787"/>
             </a:xfrm>
             <a:prstGeom prst="rect">
               <a:avLst/>
@@ -15870,21 +15924,21 @@
                   </a:solidFill>
                   <a:latin typeface="Segoe UI"/>
                 </a:rPr>
-                <a:t>62</a:t>
+                <a:t>858</a:t>
               </a:r>
             </a:p>
           </p:txBody>
         </p:sp>
         <p:sp>
           <p:nvSpPr>
-            <p:cNvPr id="49" name="P05 · события"/>
+            <p:cNvPr id="49" name="P05 · событий"/>
             <p:cNvSpPr txBox="1"/>
             <p:nvPr/>
           </p:nvSpPr>
           <p:spPr>
             <a:xfrm>
-              <a:off x="1739900" y="5283200"/>
-              <a:ext cx="1600200" cy="270271"/>
+              <a:off x="838200" y="5753100"/>
+              <a:ext cx="2413000" cy="270271"/>
             </a:xfrm>
             <a:prstGeom prst="rect">
               <a:avLst/>
@@ -15918,21 +15972,21 @@
                   </a:solidFill>
                   <a:latin typeface="Segoe UI"/>
                 </a:rPr>
-                <a:t>события</a:t>
+                <a:t>событий</a:t>
               </a:r>
             </a:p>
           </p:txBody>
         </p:sp>
         <p:sp>
           <p:nvSpPr>
-            <p:cNvPr id="50" name="P05 · 93"/>
+            <p:cNvPr id="50" name="P05 · 1041"/>
             <p:cNvSpPr txBox="1"/>
             <p:nvPr/>
           </p:nvSpPr>
           <p:spPr>
             <a:xfrm>
-              <a:off x="3581400" y="5092700"/>
-              <a:ext cx="762000" cy="658787"/>
+              <a:off x="3581400" y="5067300"/>
+              <a:ext cx="2413000" cy="658787"/>
             </a:xfrm>
             <a:prstGeom prst="rect">
               <a:avLst/>
@@ -15966,21 +16020,21 @@
                   </a:solidFill>
                   <a:latin typeface="Segoe UI"/>
                 </a:rPr>
-                <a:t>93</a:t>
+                <a:t>1041</a:t>
               </a:r>
             </a:p>
           </p:txBody>
         </p:sp>
         <p:sp>
           <p:nvSpPr>
-            <p:cNvPr id="51" name="P05 · варианта посещения"/>
+            <p:cNvPr id="51" name="P05 · сеанс / период"/>
             <p:cNvSpPr txBox="1"/>
             <p:nvPr/>
           </p:nvSpPr>
           <p:spPr>
             <a:xfrm>
-              <a:off x="4483100" y="5283200"/>
-              <a:ext cx="1600200" cy="518175"/>
+              <a:off x="3581400" y="5753100"/>
+              <a:ext cx="2413000" cy="270271"/>
             </a:xfrm>
             <a:prstGeom prst="rect">
               <a:avLst/>
@@ -16014,31 +16068,21 @@
                   </a:solidFill>
                   <a:latin typeface="Segoe UI"/>
                 </a:rPr>
-                <a:t>варианта</a:t>
-              </a:r>
-              <a:br/>
-              <a:r>
-                <a:rPr sz="1600" b="0" i="0" u="none" lang="ru-RU" kern="120000">
-                  <a:solidFill>
-                    <a:srgbClr val="142F3D"/>
-                  </a:solidFill>
-                  <a:latin typeface="Segoe UI"/>
-                </a:rPr>
-                <a:t>посещения</a:t>
+                <a:t>сеанс / период</a:t>
               </a:r>
             </a:p>
           </p:txBody>
         </p:sp>
         <p:sp>
           <p:nvSpPr>
-            <p:cNvPr id="52" name="P05 · 5"/>
+            <p:cNvPr id="52" name="P05 · 26"/>
             <p:cNvSpPr txBox="1"/>
             <p:nvPr/>
           </p:nvSpPr>
           <p:spPr>
             <a:xfrm>
-              <a:off x="6324600" y="5092700"/>
-              <a:ext cx="762000" cy="658787"/>
+              <a:off x="6324600" y="5067300"/>
+              <a:ext cx="2413000" cy="658787"/>
             </a:xfrm>
             <a:prstGeom prst="rect">
               <a:avLst/>
@@ -16072,7 +16116,7 @@
                   </a:solidFill>
                   <a:latin typeface="Segoe UI"/>
                 </a:rPr>
-                <a:t>5</a:t>
+                <a:t>26</a:t>
               </a:r>
             </a:p>
           </p:txBody>
@@ -16085,8 +16129,8 @@
           </p:nvSpPr>
           <p:spPr>
             <a:xfrm>
-              <a:off x="7226300" y="5283200"/>
-              <a:ext cx="1600200" cy="270271"/>
+              <a:off x="6324600" y="5753100"/>
+              <a:ext cx="2413000" cy="270271"/>
             </a:xfrm>
             <a:prstGeom prst="rect">
               <a:avLst/>
@@ -16127,14 +16171,14 @@
         </p:sp>
         <p:sp>
           <p:nvSpPr>
-            <p:cNvPr id="54" name="P05 · 2"/>
+            <p:cNvPr id="54" name="P05 · 11"/>
             <p:cNvSpPr txBox="1"/>
             <p:nvPr/>
           </p:nvSpPr>
           <p:spPr>
             <a:xfrm>
-              <a:off x="9067800" y="5092700"/>
-              <a:ext cx="762000" cy="658787"/>
+              <a:off x="9067800" y="5067300"/>
+              <a:ext cx="2413000" cy="658787"/>
             </a:xfrm>
             <a:prstGeom prst="rect">
               <a:avLst/>
@@ -16168,21 +16212,21 @@
                   </a:solidFill>
                   <a:latin typeface="Segoe UI"/>
                 </a:rPr>
-                <a:t>2</a:t>
+                <a:t>11</a:t>
               </a:r>
             </a:p>
           </p:txBody>
         </p:sp>
         <p:sp>
           <p:nvSpPr>
-            <p:cNvPr id="55" name="P05 · города"/>
+            <p:cNvPr id="55" name="P05 · городов"/>
             <p:cNvSpPr txBox="1"/>
             <p:nvPr/>
           </p:nvSpPr>
           <p:spPr>
             <a:xfrm>
-              <a:off x="9969500" y="5283200"/>
-              <a:ext cx="1600200" cy="270271"/>
+              <a:off x="9067800" y="5753100"/>
+              <a:ext cx="2413000" cy="270271"/>
             </a:xfrm>
             <a:prstGeom prst="rect">
               <a:avLst/>
@@ -16216,7 +16260,7 @@
                   </a:solidFill>
                   <a:latin typeface="Segoe UI"/>
                 </a:rPr>
-                <a:t>города</a:t>
+                <a:t>городов</a:t>
               </a:r>
             </a:p>
           </p:txBody>
@@ -16224,7 +16268,7 @@
       </p:grpSp>
       <p:sp>
         <p:nvSpPr>
-          <p:cNvPr id="56" name="P05 · Сбор 26.09.2026 · окно 26.09–25.10.2026 · Казань и Екатеринбург"/>
+          <p:cNvPr id="56" name="P05 · Измерение 28.09.2026 · 985 сеансов + 56 выставочных периодов"/>
           <p:cNvSpPr txBox="1"/>
           <p:nvPr/>
         </p:nvSpPr>
@@ -16265,7 +16309,7 @@
                 </a:solidFill>
                 <a:latin typeface="Segoe UI"/>
               </a:rPr>
-              <a:t>Сбор 26.09.2026 · окно 26.09–25.10.2026 · Казань и Екатеринбург</a:t>
+              <a:t>Измерение 28.09.2026 · 985 сеансов + 56 выставочных периодов</a:t>
             </a:r>
           </a:p>
         </p:txBody>
@@ -16360,7 +16404,7 @@
         </p:grpSpPr>
         <p:sp>
           <p:nvSpPr>
-            <p:cNvPr id="4" name="P06 · Схема интерфейса · сохранённый выбор"/>
+            <p:cNvPr id="4" name="P06 · Схема интерфейса · визит 27.09.2026"/>
             <p:cNvSpPr txBox="1"/>
             <p:nvPr/>
           </p:nvSpPr>
@@ -16401,7 +16445,7 @@
                   </a:solidFill>
                   <a:latin typeface="Segoe UI"/>
                 </a:rPr>
-                <a:t>Схема интерфейса · сохранённый выбор</a:t>
+                <a:t>Схема интерфейса · визит 27.09.2026</a:t>
               </a:r>
             </a:p>
           </p:txBody>
@@ -17324,7 +17368,7 @@
       </p:sp>
       <p:sp>
         <p:nvSpPr>
-          <p:cNvPr id="27" name="P06 · Хранятся настройки, закладки и технические идентификаторы MAX."/>
+          <p:cNvPr id="27" name="P06 · Настройки, закладки и идентификаторы MAX хранятся в личной записи."/>
           <p:cNvSpPr txBox="1"/>
           <p:nvPr/>
         </p:nvSpPr>
@@ -17365,7 +17409,7 @@
                 </a:solidFill>
                 <a:latin typeface="Segoe UI"/>
               </a:rPr>
-              <a:t>Хранятся настройки, закладки и технические идентификаторы MAX.</a:t>
+              <a:t>Настройки, закладки и идентификаторы MAX хранятся в личной записи.</a:t>
             </a:r>
             <a:br/>
             <a:r>
@@ -17375,7 +17419,7 @@
                 </a:solidFill>
                 <a:latin typeface="Segoe UI"/>
               </a:rPr>
-              <a:t>Удаление данных бота не стирает историю чата и старые резервные копии.</a:t>
+              <a:t>Удаление в боте не стирает историю чата и старые резервные копии.</a:t>
             </a:r>
           </a:p>
         </p:txBody>
@@ -18256,14 +18300,14 @@
         </p:sp>
         <p:sp>
           <p:nvSpPr>
-            <p:cNvPr id="26" name="P07 · Факты и источники"/>
+            <p:cNvPr id="26" name="P07 · По городам"/>
             <p:cNvSpPr txBox="1"/>
             <p:nvPr/>
           </p:nvSpPr>
           <p:spPr>
             <a:xfrm>
               <a:off x="1219200" y="4953000"/>
-              <a:ext cx="2336800" cy="287163"/>
+              <a:ext cx="2336800" cy="550561"/>
             </a:xfrm>
             <a:prstGeom prst="rect">
               <a:avLst/>
@@ -18297,7 +18341,17 @@
                   </a:solidFill>
                   <a:latin typeface="Segoe UI"/>
                 </a:rPr>
-                <a:t>Факты и источники</a:t>
+                <a:t>По городам</a:t>
+              </a:r>
+              <a:br/>
+              <a:r>
+                <a:rPr sz="1700" b="0" i="0" u="none" lang="ru-RU" kern="120000">
+                  <a:solidFill>
+                    <a:srgbClr val="47616B"/>
+                  </a:solidFill>
+                  <a:latin typeface="Segoe UI"/>
+                </a:rPr>
+                <a:t>и источникам</a:t>
               </a:r>
             </a:p>
           </p:txBody>
@@ -19151,7 +19205,7 @@
       </p:sp>
       <p:sp>
         <p:nvSpPr>
-          <p:cNvPr id="3" name="P08 · 257"/>
+          <p:cNvPr id="3" name="P08 · 341"/>
           <p:cNvSpPr txBox="1"/>
           <p:nvPr/>
         </p:nvSpPr>
@@ -19192,7 +19246,7 @@
                 </a:solidFill>
                 <a:latin typeface="Segoe UI"/>
               </a:rPr>
-              <a:t>257</a:t>
+              <a:t>341</a:t>
             </a:r>
           </a:p>
         </p:txBody>
@@ -19257,7 +19311,7 @@
       </p:sp>
       <p:sp>
         <p:nvSpPr>
-          <p:cNvPr id="5" name="P08 · Зафиксировано 26.09.2026"/>
+          <p:cNvPr id="5" name="P08 · Зафиксировано 28.09.2026"/>
           <p:cNvSpPr txBox="1"/>
           <p:nvPr/>
         </p:nvSpPr>
@@ -19298,14 +19352,14 @@
                 </a:solidFill>
                 <a:latin typeface="Segoe UI"/>
               </a:rPr>
-              <a:t>Зафиксировано 26.09.2026</a:t>
-            </a:r>
-          </a:p>
-        </p:txBody>
-      </p:sp>
-      <p:sp>
-        <p:nvSpPr>
-          <p:cNvPr id="6" name="P08 · Позднейшие 29 проверок —"/>
+              <a:t>Зафиксировано 28.09.2026</a:t>
+            </a:r>
+          </a:p>
+        </p:txBody>
+      </p:sp>
+      <p:sp>
+        <p:nvSpPr>
+          <p:cNvPr id="6" name="P08 · Локальные проверки;"/>
           <p:cNvSpPr txBox="1"/>
           <p:nvPr/>
         </p:nvSpPr>
@@ -19346,7 +19400,7 @@
                 </a:solidFill>
                 <a:latin typeface="Segoe UI"/>
               </a:rPr>
-              <a:t>Позднейшие 29 проверок —</a:t>
+              <a:t>Локальные проверки;</a:t>
             </a:r>
             <a:br/>
             <a:r>
@@ -19356,7 +19410,7 @@
                 </a:solidFill>
                 <a:latin typeface="Segoe UI"/>
               </a:rPr>
-              <a:t>повтор части набора</a:t>
+              <a:t>MAX mobile/web отдельно</a:t>
             </a:r>
           </a:p>
         </p:txBody>
@@ -19411,7 +19465,7 @@
       </p:sp>
       <p:sp>
         <p:nvSpPr>
-          <p:cNvPr id="8" name="P08 · Правила подбора"/>
+          <p:cNvPr id="8" name="P08 · Данные и правила подбора"/>
           <p:cNvSpPr txBox="1"/>
           <p:nvPr/>
         </p:nvSpPr>
@@ -19452,14 +19506,14 @@
                 </a:solidFill>
                 <a:latin typeface="Segoe UI"/>
               </a:rPr>
-              <a:t>Правила подбора</a:t>
-            </a:r>
-          </a:p>
-        </p:txBody>
-      </p:sp>
-      <p:sp>
-        <p:nvSpPr>
-          <p:cNvPr id="9" name="P08 · Не обещать неподтверждённые"/>
+              <a:t>Данные и правила подбора</a:t>
+            </a:r>
+          </a:p>
+        </p:txBody>
+      </p:sp>
+      <p:sp>
+        <p:nvSpPr>
+          <p:cNvPr id="9" name="P08 · Парсеры, даты, тарифы, дубли,"/>
           <p:cNvSpPr txBox="1"/>
           <p:nvPr/>
         </p:nvSpPr>
@@ -19500,7 +19554,7 @@
                 </a:solidFill>
                 <a:latin typeface="Segoe UI"/>
               </a:rPr>
-              <a:t>Не обещать неподтверждённые</a:t>
+              <a:t>Парсеры, даты, тарифы, дубли,</a:t>
             </a:r>
             <a:br/>
             <a:r>
@@ -19510,7 +19564,7 @@
                 </a:solidFill>
                 <a:latin typeface="Segoe UI"/>
               </a:rPr>
-              <a:t>цену, время и семейный тариф</a:t>
+              <a:t>свежесть и допуск источников</a:t>
             </a:r>
           </a:p>
         </p:txBody>
@@ -19613,7 +19667,7 @@
       </p:sp>
       <p:sp>
         <p:nvSpPr>
-          <p:cNvPr id="12" name="P08 · Сохранять личный выбор"/>
+          <p:cNvPr id="12" name="P08 · 11 маршрутов: SQLite и симулятор"/>
           <p:cNvSpPr txBox="1"/>
           <p:nvPr/>
         </p:nvSpPr>
@@ -19654,7 +19708,7 @@
                 </a:solidFill>
                 <a:latin typeface="Segoe UI"/>
               </a:rPr>
-              <a:t>Сохранять личный выбор</a:t>
+              <a:t>11 маршрутов: SQLite и симулятор</a:t>
             </a:r>
             <a:br/>
             <a:r>
@@ -19664,7 +19718,7 @@
                 </a:solidFill>
                 <a:latin typeface="Segoe UI"/>
               </a:rPr>
-              <a:t>между запусками приложения</a:t>
+              <a:t>MAX; сохранение и открытие</a:t>
             </a:r>
           </a:p>
         </p:txBody>
@@ -19921,7 +19975,7 @@
       </p:sp>
       <p:sp>
         <p:nvSpPr>
-          <p:cNvPr id="18" name="P08 · Явно показывать ошибки"/>
+          <p:cNvPr id="18" name="P08 · Явные ошибки, неизвестные"/>
           <p:cNvSpPr txBox="1"/>
           <p:nvPr/>
         </p:nvSpPr>
@@ -19962,7 +20016,7 @@
                 </a:solidFill>
                 <a:latin typeface="Segoe UI"/>
               </a:rPr>
-              <a:t>Явно показывать ошибки</a:t>
+              <a:t>Явные ошибки, неизвестные</a:t>
             </a:r>
             <a:br/>
             <a:r>
@@ -19972,7 +20026,7 @@
                 </a:solidFill>
                 <a:latin typeface="Segoe UI"/>
               </a:rPr>
-              <a:t>и недоступность сведений</a:t>
+              <a:t>условия и устаревшие сведения</a:t>
             </a:r>
           </a:p>
         </p:txBody>
@@ -20005,7 +20059,7 @@
       <p:grpSpPr/>
       <p:sp>
         <p:nvSpPr>
-          <p:cNvPr id="2" name="P09 · Дальше — больше источников и свежие данные"/>
+          <p:cNvPr id="2" name="P09 · От двух городов к 11 — теперь глубже"/>
           <p:cNvSpPr txBox="1"/>
           <p:nvPr/>
         </p:nvSpPr>
@@ -20046,7 +20100,7 @@
                 </a:solidFill>
                 <a:latin typeface="Segoe UI"/>
               </a:rPr>
-              <a:t>Дальше — больше источников и свежие данные</a:t>
+              <a:t>От двух городов к 11 — теперь глубже</a:t>
             </a:r>
           </a:p>
         </p:txBody>
@@ -20186,7 +20240,7 @@
       </p:grpSp>
       <p:sp>
         <p:nvSpPr>
-          <p:cNvPr id="7" name="P09 · Глубже"/>
+          <p:cNvPr id="7" name="P09 · 11 городов"/>
           <p:cNvSpPr txBox="1"/>
           <p:nvPr/>
         </p:nvSpPr>
@@ -20227,7 +20281,7 @@
                 </a:solidFill>
                 <a:latin typeface="Segoe UI"/>
               </a:rPr>
-              <a:t>Глубже</a:t>
+              <a:t>11 городов</a:t>
             </a:r>
             <a:br/>
             <a:r>
@@ -20237,14 +20291,14 @@
                 </a:solidFill>
                 <a:latin typeface="Segoe UI"/>
               </a:rPr>
-              <a:t>в двух городах</a:t>
-            </a:r>
-          </a:p>
-        </p:txBody>
-      </p:sp>
-      <p:sp>
-        <p:nvSpPr>
-          <p:cNvPr id="8" name="P09 · Расширить покрытие"/>
+              <a:t>уже в каталоге</a:t>
+            </a:r>
+          </a:p>
+        </p:txBody>
+      </p:sp>
+      <p:sp>
+        <p:nvSpPr>
+          <p:cNvPr id="8" name="P09 · Единый подбор"/>
           <p:cNvSpPr txBox="1"/>
           <p:nvPr/>
         </p:nvSpPr>
@@ -20285,7 +20339,7 @@
                 </a:solidFill>
                 <a:latin typeface="Segoe UI"/>
               </a:rPr>
-              <a:t>Расширить покрытие</a:t>
+              <a:t>Единый подбор</a:t>
             </a:r>
             <a:br/>
             <a:r>
@@ -20295,7 +20349,7 @@
                 </a:solidFill>
                 <a:latin typeface="Segoe UI"/>
               </a:rPr>
-              <a:t>и уточнить возрастные</a:t>
+              <a:t>для разных площадок</a:t>
             </a:r>
             <a:br/>
             <a:r>
@@ -20305,7 +20359,7 @@
                 </a:solidFill>
                 <a:latin typeface="Segoe UI"/>
               </a:rPr>
-              <a:t>условия и тарифы</a:t>
+              <a:t>и часовых поясов</a:t>
             </a:r>
           </a:p>
         </p:txBody>
@@ -20445,7 +20499,7 @@
       </p:grpSp>
       <p:sp>
         <p:nvSpPr>
-          <p:cNvPr id="13" name="P09 · Больше источников"/>
+          <p:cNvPr id="13" name="P09 · Глубже"/>
           <p:cNvSpPr txBox="1"/>
           <p:nvPr/>
         </p:nvSpPr>
@@ -20486,7 +20540,7 @@
                 </a:solidFill>
                 <a:latin typeface="Segoe UI"/>
               </a:rPr>
-              <a:t>Больше источников</a:t>
+              <a:t>Глубже</a:t>
             </a:r>
             <a:br/>
             <a:r>
@@ -20496,14 +20550,14 @@
                 </a:solidFill>
                 <a:latin typeface="Segoe UI"/>
               </a:rPr>
-              <a:t>и городов</a:t>
-            </a:r>
-          </a:p>
-        </p:txBody>
-      </p:sp>
-      <p:sp>
-        <p:nvSpPr>
-          <p:cNvPr id="14" name="P09 · Добавлять проверенные"/>
+              <a:t>в каждом городе</a:t>
+            </a:r>
+          </a:p>
+        </p:txBody>
+      </p:sp>
+      <p:sp>
+        <p:nvSpPr>
+          <p:cNvPr id="14" name="P09 · Больше местных событий,"/>
           <p:cNvSpPr txBox="1"/>
           <p:nvPr/>
         </p:nvSpPr>
@@ -20544,7 +20598,7 @@
                 </a:solidFill>
                 <a:latin typeface="Segoe UI"/>
               </a:rPr>
-              <a:t>Добавлять проверенные</a:t>
+              <a:t>Больше местных событий,</a:t>
             </a:r>
             <a:br/>
             <a:r>
@@ -20554,7 +20608,7 @@
                 </a:solidFill>
                 <a:latin typeface="Segoe UI"/>
               </a:rPr>
-              <a:t>публикации и адаптеры</a:t>
+              <a:t>применимых тарифов</a:t>
             </a:r>
             <a:br/>
             <a:r>
@@ -20564,7 +20618,7 @@
                 </a:solidFill>
                 <a:latin typeface="Segoe UI"/>
               </a:rPr>
-              <a:t>с учётом местных условий</a:t>
+              <a:t>и часов посещения</a:t>
             </a:r>
           </a:p>
         </p:txBody>
@@ -20677,7 +20731,7 @@
       </p:sp>
       <p:sp>
         <p:nvSpPr>
-          <p:cNvPr id="17" name="P09 · Получать события"/>
+          <p:cNvPr id="17" name="P09 · Доступ и условия API,"/>
           <p:cNvSpPr txBox="1"/>
           <p:nvPr/>
         </p:nvSpPr>
@@ -20718,7 +20772,7 @@
                 </a:solidFill>
                 <a:latin typeface="Segoe UI"/>
               </a:rPr>
-              <a:t>Получать события</a:t>
+              <a:t>Доступ и условия API,</a:t>
             </a:r>
             <a:br/>
             <a:r>
@@ -20728,7 +20782,7 @@
                 </a:solidFill>
                 <a:latin typeface="Segoe UI"/>
               </a:rPr>
-              <a:t>по поддержанным фильтрам</a:t>
+              <a:t>затем плановые</a:t>
             </a:r>
             <a:br/>
             <a:r>
@@ -20738,7 +20792,7 @@
                 </a:solidFill>
                 <a:latin typeface="Segoe UI"/>
               </a:rPr>
-              <a:t>и обновлять автоматически</a:t>
+              <a:t>обновления</a:t>
             </a:r>
           </a:p>
         </p:txBody>
@@ -20789,14 +20843,14 @@
         </p:sp>
         <p:sp>
           <p:nvSpPr>
-            <p:cNvPr id="19" name="P09 · Для API нужны доступ и условия использования, полезные поля и фильтры,"/>
+            <p:cNvPr id="19" name="P09 · Казань · Екатеринбург · Санкт-Петербург · Москва"/>
             <p:cNvSpPr txBox="1"/>
             <p:nvPr/>
           </p:nvSpPr>
           <p:spPr>
             <a:xfrm>
-              <a:off x="609600" y="5245100"/>
-              <a:ext cx="10972800" cy="615333"/>
+              <a:off x="609600" y="5168900"/>
+              <a:ext cx="10972800" cy="861839"/>
             </a:xfrm>
             <a:prstGeom prst="rect">
               <a:avLst/>
@@ -20804,7 +20858,7 @@
             <a:noFill/>
           </p:spPr>
           <p:txBody>
-            <a:bodyPr wrap="none" lIns="0" rIns="0" tIns="38608" bIns="0" anchor="t">
+            <a:bodyPr wrap="none" lIns="0" rIns="0" tIns="36576" bIns="0" anchor="t">
               <a:noAutofit/>
             </a:bodyPr>
             <a:lstStyle/>
@@ -20819,28 +20873,38 @@
                 <a:spcAft>
                   <a:spcPts val="0"/>
                 </a:spcAft>
-                <a:defRPr sz="1900">
+                <a:defRPr sz="1800">
                   <a:latin typeface="Segoe UI"/>
                 </a:defRPr>
               </a:pPr>
               <a:r>
-                <a:rPr sz="1900" b="0" i="0" u="none" lang="ru-RU" kern="120000">
+                <a:rPr sz="1800" b="0" i="0" u="none" lang="ru-RU" kern="120000">
                   <a:solidFill>
                     <a:srgbClr val="FFFFFF"/>
                   </a:solidFill>
                   <a:latin typeface="Segoe UI"/>
                 </a:rPr>
-                <a:t>Для API нужны доступ и условия использования, полезные поля и фильтры,</a:t>
+                <a:t>Казань · Екатеринбург · Санкт-Петербург · Москва</a:t>
               </a:r>
               <a:br/>
               <a:r>
-                <a:rPr sz="1900" b="0" i="0" u="none" lang="ru-RU" kern="120000">
+                <a:rPr sz="1800" b="0" i="0" u="none" lang="ru-RU" kern="120000">
                   <a:solidFill>
                     <a:srgbClr val="FFFFFF"/>
                   </a:solidFill>
                   <a:latin typeface="Segoe UI"/>
                 </a:rPr>
-                <a:t>согласованная частота обновлений. Неполные данные останутся явными.</a:t>
+                <a:t>Нижний Новгород · Самара · Пермь · Уфа</a:t>
+              </a:r>
+              <a:br/>
+              <a:r>
+                <a:rPr sz="1800" b="0" i="0" u="none" lang="ru-RU" kern="120000">
+                  <a:solidFill>
+                    <a:srgbClr val="FFFFFF"/>
+                  </a:solidFill>
+                  <a:latin typeface="Segoe UI"/>
+                </a:rPr>
+                <a:t>Новосибирск · Красноярск · Челябинск</a:t>
               </a:r>
             </a:p>
           </p:txBody>

--- a/presentation/cultural-plan.pptx
+++ b/presentation/cultural-plan.pptx
@@ -724,7 +724,7 @@
           <a:lstStyle/>
           <a:p>
             <a:r>
-              <a:t>«Подбор и закладки работают с каталогом 11 городов; дата, состав и неизвестные условия видны». Не обещаем наличие билетов, полноту афиши или семейную цену при неизвестном тарифе. Ограничения измеренного набора — в брифинге (https://github.com/AiratBastanov/HackMaxBot2026/blob/main/docs/DEFENSE_BRIEF.md). Репозиторный указатель не установлен автоматически в работающий бот. Следующий операционный шаг и сроки свежести вынесены в передачу (https://github.com/AiratBastanov/HackMaxBot2026/blob/main/docs/SUBMISSION_READINESS.md); во время этой задачи установка не выполняется.</a:t>
+              <a:t>«Подбор и закладки работают с каталогом 11 городов; дата, состав и неизвестные условия видны». Не обещаем наличие билетов, полноту афиши или семейную цену при неизвестном тарифе. Ограничения измеренного набора — в брифинге (https://github.com/AiratBastanov/HackMaxBot2026/blob/main/docs/DEFENSE_BRIEF.md). Подготовка при запуске выбирает свежий проверенный каталог. Сроки наблюдений и обслуживание описаны в операторской инструкции (https://github.com/AiratBastanov/HackMaxBot2026/blob/main/docs/CATALOG_OPERATIONS.md).</a:t>
             </a:r>
           </a:p>
         </p:txBody>
@@ -1086,7 +1086,7 @@
           <a:p/>
           <a:p>
             <a:r>
-              <a:t>Используются HTML, структурированные данные внутри страниц и рассмотренные публичные интерфейсы конкретных источников. Публичная страница не автоматически API или лицензия. Для каждого источника есть отдельное решение PUBLIC_FACTS и проверка hash/review; фотографии и статьи не копируются. Оператор запускает автоматическое извлечение; планировщика пока нет. Подробный реестр (https://github.com/AiratBastanov/HackMaxBot2026/blob/main/docs/SOURCE_INVENTORY.md).</a:t>
+              <a:t>Используются HTML, структурированные данные внутри страниц и рассмотренные публичные интерфейсы конкретных источников. Публичная страница не автоматически API или лицензия. Для каждого источника есть отдельное решение PUBLIC_FACTS и проверка hash/review; фотографии и статьи не копируются. При запуске Docker каталог готовится автоматически; полное обновление и расписание обслуживания задаёт оператор. Подробный реестр (https://github.com/AiratBastanov/HackMaxBot2026/blob/main/docs/SOURCE_INVENTORY.md).</a:t>
             </a:r>
           </a:p>
         </p:txBody>
@@ -1226,7 +1226,7 @@
           <a:lstStyle/>
           <a:p>
             <a:r>
-              <a:t>MAX передаёт запрос, сервер оценивает условия, каталог объединяет допущенные части по городу и источнику, SQLite хранит параметры и закладки. Истечение одного источника не выключает остальные. Для показа и открытия сохранённого выбора проверяются источник, snapshot/hash и срок. TypeScript, Fastify, SQLite и Docker уже используются; новых технологий не заявляем. Профиль webhook подготовлен, постоянное размещение ещё не выполнено. Схема логическая, не изображение уже работающего облака.</a:t>
+              <a:t>MAX передаёт запрос, сервер оценивает условия, каталог объединяет допущенные части по городу и источнику, SQLite хранит параметры и закладки. Истечение одного источника не выключает остальные. Для показа и открытия сохранённого выбора проверяются источник, snapshot/hash и срок. TypeScript, Fastify, SQLite и Docker уже используются; новых технологий не заявляем. Для постоянного размещения поддерживается Webhook через HTTPS. Схема показывает функции компонентов.</a:t>
             </a:r>
           </a:p>
         </p:txBody>
@@ -1296,13 +1296,13 @@
           <a:lstStyle/>
           <a:p>
             <a:r>
-              <a:t>В кампании 28.09 прошёл 341 автоматический тест: парсеры, даты, тарифы, дубли, правила подбора, допуск/свежесть, хранение и ошибки. Отдельно проверены 42 образца источников и 11 маршрутов с настоящими SQLite/worker/outbox и симулированным MAX. Это записанное доказательство; при обновлении защиты проверки приложения не повторялись. Отчёт (https://github.com/AiratBastanov/HackMaxBot2026/blob/main/docs/verification/MULTI_CITY_CATALOG.md).</a:t>
+              <a:t>В проверке текущего приложения 28.09 прошли 343 автоматических теста: парсеры, даты, тарифы, дубли, правила подбора, допуск/свежесть, хранение и ошибки. Дополнительно проверены новая установка, повышение версии, защита от понижения и повреждения, просрочка, независимые источники и закладки через SQLite и симулятор MAX. Техническая запись (https://github.com/AiratBastanov/HackMaxBot2026/blob/main/docs/verification/CATALOG_STARTUP.md). Отдельная кампания расширения зафиксировала 341 тест, 42 образца источников и 11 маршрутов; её source checks и замеры повторно не выполнялись.</a:t>
             </a:r>
           </a:p>
           <a:p/>
           <a:p>
             <a:r>
-              <a:t>Локальное время самого долгого запроса селектора — 39,06 мс; полный отдельный процесс матрицы — 1 438 мс на измеренном наборе/окружении. Это не задержка ответа MAX, нагрузочный SLA или доказательство доступности. Замеры в byCity и benchmark относятся к записанным проходам, их не смешиваем. Новая кешированная сборка Docker не подменяет историческое измерение чистой сборки. Человеческие mobile/web-статусы сохранены без нового PASS.</a:t>
+              <a:t>Локальное время самого долгого запроса селектора — 39,06 мс; полный отдельный процесс матрицы — 1 438 мс на измеренном наборе/окружении. Это не задержка ответа MAX, нагрузочный SLA или доказательство доступности. Замеры в byCity и benchmark относятся к записанным проходам, их не смешиваем. Новая кешированная сборка Docker не подменяет историческое измерение чистой сборки. Область этой проверки — приложение и симулятор MAX.</a:t>
             </a:r>
           </a:p>
         </p:txBody>
@@ -1372,7 +1372,7 @@
           <a:lstStyle/>
           <a:p>
             <a:r>
-              <a:t>Переход от двух к 11 городам реализован. Перечень на слайде показывает широту одного сценария: разные площадки, источники и часовые пояса. Это не полнота каждой городской афиши. Дальше — глубина местного покрытия, применимые тарифы/часы, доступ к разрешённым API и обновление по расписанию. Для API потребуются согласованные условия, поля, фильтры и частота. Нагрузка и инфраструктура оцениваются отдельно.</a:t>
+              <a:t>Расширение до 11 городов реализовано. Перечень на слайде показывает широту одного сценария: разные площадки, источники и часовые пояса. Это не полнота каждой городской афиши. Дальше — глубина местного покрытия, применимые тарифы/часы, доступ к разрешённым API и обновление по расписанию. Для API потребуются согласованные условия, поля, фильтры и частота. Нагрузка и инфраструктура оцениваются отдельно.</a:t>
             </a:r>
           </a:p>
         </p:txBody>
@@ -7522,7 +7522,7 @@
       </p:grpSp>
       <p:sp>
         <p:nvSpPr>
-          <p:cNvPr id="29" name="P11 · Для оценки в MAX отдельно нужна постоянно доступная служба"/>
+          <p:cNvPr id="29" name="P11 · Для постоянного размещения поддерживается Webhook через HTTPS"/>
           <p:cNvSpPr txBox="1"/>
           <p:nvPr/>
         </p:nvSpPr>
@@ -7563,7 +7563,7 @@
                 </a:solidFill>
                 <a:latin typeface="Segoe UI"/>
               </a:rPr>
-              <a:t>Для оценки в MAX отдельно нужна постоянно доступная служба</a:t>
+              <a:t>Для постоянного размещения поддерживается Webhook через HTTPS</a:t>
             </a:r>
           </a:p>
         </p:txBody>
@@ -8034,7 +8034,7 @@
         </p:sp>
         <p:sp>
           <p:nvSpPr>
-            <p:cNvPr id="11" name="P12 · Границы текущей версии"/>
+            <p:cNvPr id="11" name="P12 · Условия использования"/>
             <p:cNvSpPr txBox="1"/>
             <p:nvPr/>
           </p:nvSpPr>
@@ -8075,21 +8075,21 @@
                   </a:solidFill>
                   <a:latin typeface="Segoe UI"/>
                 </a:rPr>
-                <a:t>Границы текущей версии</a:t>
+                <a:t>Условия использования</a:t>
               </a:r>
             </a:p>
           </p:txBody>
         </p:sp>
         <p:sp>
           <p:nvSpPr>
-            <p:cNvPr id="12" name="P12 · Часть афиши 11 городов"/>
+            <p:cNvPr id="12" name="P12 · Датированный срез афиш"/>
             <p:cNvSpPr txBox="1"/>
             <p:nvPr/>
           </p:nvSpPr>
           <p:spPr>
             <a:xfrm>
               <a:off x="6908800" y="2565400"/>
-              <a:ext cx="4394200" cy="304055"/>
+              <a:ext cx="4394200" cy="582947"/>
             </a:xfrm>
             <a:prstGeom prst="rect">
               <a:avLst/>
@@ -8123,14 +8123,24 @@
                   </a:solidFill>
                   <a:latin typeface="Segoe UI"/>
                 </a:rPr>
-                <a:t>Часть афиши 11 городов</a:t>
+                <a:t>Датированный срез афиш</a:t>
+              </a:r>
+              <a:br/>
+              <a:r>
+                <a:rPr sz="1800" b="0" i="0" u="none" lang="ru-RU" kern="120000">
+                  <a:solidFill>
+                    <a:srgbClr val="142F3D"/>
+                  </a:solidFill>
+                  <a:latin typeface="Segoe UI"/>
+                </a:rPr>
+                <a:t>11 городов</a:t>
               </a:r>
             </a:p>
           </p:txBody>
         </p:sp>
         <p:sp>
           <p:nvSpPr>
-            <p:cNvPr id="13" name="P12 · Цены, часы и допуск требуют"/>
+            <p:cNvPr id="13" name="P12 · Неизвестные тарифы, часы"/>
             <p:cNvSpPr txBox="1"/>
             <p:nvPr/>
           </p:nvSpPr>
@@ -8171,7 +8181,7 @@
                   </a:solidFill>
                   <a:latin typeface="Segoe UI"/>
                 </a:rPr>
-                <a:t>Цены, часы и допуск требуют</a:t>
+                <a:t>Неизвестные тарифы, часы</a:t>
               </a:r>
               <a:br/>
               <a:r>
@@ -8181,21 +8191,21 @@
                   </a:solidFill>
                   <a:latin typeface="Segoe UI"/>
                 </a:rPr>
-                <a:t>уточнения; билеты не проверены</a:t>
+                <a:t>и допуск уточняются у источника</a:t>
               </a:r>
             </a:p>
           </p:txBody>
         </p:sp>
         <p:sp>
           <p:nvSpPr>
-            <p:cNvPr id="14" name="P12 · Обновление запускает оператор"/>
+            <p:cNvPr id="14" name="P12 · Закладка сохраняет выбор;"/>
             <p:cNvSpPr txBox="1"/>
             <p:nvPr/>
           </p:nvSpPr>
           <p:spPr>
             <a:xfrm>
               <a:off x="6908800" y="4064000"/>
-              <a:ext cx="4394200" cy="304055"/>
+              <a:ext cx="4394200" cy="582947"/>
             </a:xfrm>
             <a:prstGeom prst="rect">
               <a:avLst/>
@@ -8229,21 +8239,31 @@
                   </a:solidFill>
                   <a:latin typeface="Segoe UI"/>
                 </a:rPr>
-                <a:t>Обновление запускает оператор</a:t>
+                <a:t>Закладка сохраняет выбор;</a:t>
+              </a:r>
+              <a:br/>
+              <a:r>
+                <a:rPr sz="1800" b="0" i="0" u="none" lang="ru-RU" kern="120000">
+                  <a:solidFill>
+                    <a:srgbClr val="142F3D"/>
+                  </a:solidFill>
+                  <a:latin typeface="Segoe UI"/>
+                </a:rPr>
+                <a:t>билет приобретается отдельно</a:t>
               </a:r>
             </a:p>
           </p:txBody>
         </p:sp>
         <p:sp>
           <p:nvSpPr>
-            <p:cNvPr id="15" name="P12 · Постоянная служба и текущий"/>
+            <p:cNvPr id="15" name="P12 · Свежесть сведений проверяется"/>
             <p:cNvSpPr txBox="1"/>
             <p:nvPr/>
           </p:nvSpPr>
           <p:spPr>
             <a:xfrm>
               <a:off x="6908800" y="4673600"/>
-              <a:ext cx="4394200" cy="861839"/>
+              <a:ext cx="4394200" cy="582947"/>
             </a:xfrm>
             <a:prstGeom prst="rect">
               <a:avLst/>
@@ -8277,7 +8297,7 @@
                   </a:solidFill>
                   <a:latin typeface="Segoe UI"/>
                 </a:rPr>
-                <a:t>Постоянная служба и текущий</a:t>
+                <a:t>Свежесть сведений проверяется</a:t>
               </a:r>
               <a:br/>
               <a:r>
@@ -8287,17 +8307,7 @@
                   </a:solidFill>
                   <a:latin typeface="Segoe UI"/>
                 </a:rPr>
-                <a:t>интерфейс MAX mobile/web</a:t>
-              </a:r>
-              <a:br/>
-              <a:r>
-                <a:rPr sz="1800" b="0" i="0" u="none" lang="ru-RU" kern="120000">
-                  <a:solidFill>
-                    <a:srgbClr val="142F3D"/>
-                  </a:solidFill>
-                  <a:latin typeface="Segoe UI"/>
-                </a:rPr>
-                <a:t>отдельно не подтверждены</a:t>
+                <a:t>перед показом события</a:t>
               </a:r>
             </a:p>
           </p:txBody>
@@ -8305,7 +8315,7 @@
       </p:grpSp>
       <p:sp>
         <p:nvSpPr>
-          <p:cNvPr id="16" name="P12 · Далее — глубина местных данных и подготовка постоянной оценки в MAX"/>
+          <p:cNvPr id="16" name="P12 · Далее — глубина местных данных, тарифы и плановое обновление"/>
           <p:cNvSpPr txBox="1"/>
           <p:nvPr/>
         </p:nvSpPr>
@@ -8346,7 +8356,7 @@
                 </a:solidFill>
                 <a:latin typeface="Segoe UI"/>
               </a:rPr>
-              <a:t>Далее — глубина местных данных и подготовка постоянной оценки в MAX</a:t>
+              <a:t>Далее — глубина местных данных, тарифы и плановое обновление</a:t>
             </a:r>
           </a:p>
         </p:txBody>
@@ -9607,7 +9617,7 @@
         </p:sp>
         <p:sp>
           <p:nvSpPr>
-            <p:cNvPr id="27" name="P13 · Результаты проверок">
+            <p:cNvPr id="27" name="P13 · Проверка решения">
               <a:hlinkClick r:id="rId10"/>
             </p:cNvPr>
             <p:cNvSpPr txBox="1"/>
@@ -9650,14 +9660,14 @@
                   </a:solidFill>
                   <a:latin typeface="Segoe UI"/>
                 </a:rPr>
-                <a:t>Результаты проверок</a:t>
+                <a:t>Проверка решения</a:t>
               </a:r>
             </a:p>
           </p:txBody>
         </p:sp>
         <p:sp>
           <p:nvSpPr>
-            <p:cNvPr id="28" name="P13 · Локальная кампания 28.09.2026">
+            <p:cNvPr id="28" name="P13 · Сценарий для организаторов">
               <a:hlinkClick r:id="rId10"/>
             </p:cNvPr>
             <p:cNvSpPr txBox="1"/>
@@ -9700,7 +9710,7 @@
                   </a:solidFill>
                   <a:latin typeface="Segoe UI"/>
                 </a:rPr>
-                <a:t>Локальная кампания 28.09.2026</a:t>
+                <a:t>Сценарий для организаторов</a:t>
               </a:r>
             </a:p>
           </p:txBody>
@@ -15791,7 +15801,7 @@
       </p:sp>
       <p:sp>
         <p:nvSpPr>
-          <p:cNvPr id="46" name="P05 · Сбор запускает оператор; обновления по расписанию пока нет"/>
+          <p:cNvPr id="46" name="P05 · При запуске каталог готовится автоматически; полное обновление — у опе"/>
           <p:cNvSpPr txBox="1"/>
           <p:nvPr/>
         </p:nvSpPr>
@@ -15832,7 +15842,7 @@
                 </a:solidFill>
                 <a:latin typeface="Segoe UI"/>
               </a:rPr>
-              <a:t>Сбор запускает оператор; обновления по расписанию пока нет</a:t>
+              <a:t>При запуске каталог готовится автоматически; полное обновление — у оператора</a:t>
             </a:r>
           </a:p>
         </p:txBody>
@@ -19073,7 +19083,7 @@
       </p:grpSp>
       <p:sp>
         <p:nvSpPr>
-          <p:cNvPr id="42" name="P07 · Для разработки и оценки — опрос MAX. Для постоянной работы"/>
+          <p:cNvPr id="42" name="P07 · Для запуска и оценки — опрос MAX. Для постоянного размещения"/>
           <p:cNvSpPr txBox="1"/>
           <p:nvPr/>
         </p:nvSpPr>
@@ -19114,7 +19124,7 @@
                 </a:solidFill>
                 <a:latin typeface="Segoe UI"/>
               </a:rPr>
-              <a:t>Для разработки и оценки — опрос MAX. Для постоянной работы</a:t>
+              <a:t>Для запуска и оценки — опрос MAX. Для постоянного размещения</a:t>
             </a:r>
             <a:br/>
             <a:r>
@@ -19124,7 +19134,7 @@
                 </a:solidFill>
                 <a:latin typeface="Segoe UI"/>
               </a:rPr>
-              <a:t>подготовлен профиль вебхука; ещё нужны размещение и HTTPS.</a:t>
+              <a:t>поддерживается Webhook через HTTPS.</a:t>
             </a:r>
           </a:p>
         </p:txBody>
@@ -19205,7 +19215,7 @@
       </p:sp>
       <p:sp>
         <p:nvSpPr>
-          <p:cNvPr id="3" name="P08 · 341"/>
+          <p:cNvPr id="3" name="P08 · 343"/>
           <p:cNvSpPr txBox="1"/>
           <p:nvPr/>
         </p:nvSpPr>
@@ -19246,7 +19256,7 @@
                 </a:solidFill>
                 <a:latin typeface="Segoe UI"/>
               </a:rPr>
-              <a:t>341</a:t>
+              <a:t>343</a:t>
             </a:r>
           </a:p>
         </p:txBody>
@@ -19359,7 +19369,7 @@
       </p:sp>
       <p:sp>
         <p:nvSpPr>
-          <p:cNvPr id="6" name="P08 · Локальные проверки;"/>
+          <p:cNvPr id="6" name="P08 · Правила, хранение"/>
           <p:cNvSpPr txBox="1"/>
           <p:nvPr/>
         </p:nvSpPr>
@@ -19400,7 +19410,7 @@
                 </a:solidFill>
                 <a:latin typeface="Segoe UI"/>
               </a:rPr>
-              <a:t>Локальные проверки;</a:t>
+              <a:t>Правила, хранение</a:t>
             </a:r>
             <a:br/>
             <a:r>
@@ -19410,7 +19420,7 @@
                 </a:solidFill>
                 <a:latin typeface="Segoe UI"/>
               </a:rPr>
-              <a:t>MAX mobile/web отдельно</a:t>
+              <a:t>и подготовка каталога</a:t>
             </a:r>
           </a:p>
         </p:txBody>
@@ -19667,7 +19677,7 @@
       </p:sp>
       <p:sp>
         <p:nvSpPr>
-          <p:cNvPr id="12" name="P08 · 11 маршрутов: SQLite и симулятор"/>
+          <p:cNvPr id="12" name="P08 · Сохранение выбора, новая версия"/>
           <p:cNvSpPr txBox="1"/>
           <p:nvPr/>
         </p:nvSpPr>
@@ -19708,7 +19718,7 @@
                 </a:solidFill>
                 <a:latin typeface="Segoe UI"/>
               </a:rPr>
-              <a:t>11 маршрутов: SQLite и симулятор</a:t>
+              <a:t>Сохранение выбора, новая версия</a:t>
             </a:r>
             <a:br/>
             <a:r>
@@ -19718,7 +19728,7 @@
                 </a:solidFill>
                 <a:latin typeface="Segoe UI"/>
               </a:rPr>
-              <a:t>MAX; сохранение и открытие</a:t>
+              <a:t>каталога и безопасный перезапуск</a:t>
             </a:r>
           </a:p>
         </p:txBody>
@@ -20059,7 +20069,7 @@
       <p:grpSpPr/>
       <p:sp>
         <p:nvSpPr>
-          <p:cNvPr id="2" name="P09 · От двух городов к 11 — теперь глубже"/>
+          <p:cNvPr id="2" name="P09 · 11 городов — теперь глубже"/>
           <p:cNvSpPr txBox="1"/>
           <p:nvPr/>
         </p:nvSpPr>
@@ -20100,7 +20110,7 @@
                 </a:solidFill>
                 <a:latin typeface="Segoe UI"/>
               </a:rPr>
-              <a:t>От двух городов к 11 — теперь глубже</a:t>
+              <a:t>11 городов — теперь глубже</a:t>
             </a:r>
           </a:p>
         </p:txBody>
